--- a/Topic_C/Exam_Practice/TC-L03_Speaking_Workshop_Climate_Seasons_Weather.pptx
+++ b/Topic_C/Exam_Practice/TC-L03_Speaking_Workshop_Climate_Seasons_Weather.pptx
@@ -615,7 +615,11 @@
           <a:lstStyle/>
           <a:p>
             <a:r>
-              <a:rPr lang="en-US" dirty="0"/>
+              <a:rPr lang="ar-SA" dirty="0">
+                <a:latin typeface="Amiri" pitchFamily="2" charset="-78"/>
+                <a:ea typeface="Amiri" pitchFamily="2" charset="-78"/>
+                <a:cs typeface="Amiri" pitchFamily="2" charset="-78"/>
+              </a:rPr>
               <a:t>ROLE PLAY C (Develop) — a holiday that went wrong.
 SET-UP IN THE BREAKOUT ROOM: A = examiner (reads the left column ONLY — the questions, in order), B = candidate (sees the task column; Core may use the help column), C = observer (ticks the feedback checklist). 1 minute preparation, about 3 minutes speaking, 1 minute feedback, then rotate.
 Task ! is the unexpected question: in the exam the candidate has not seen it — the examiner should read it without warning.
@@ -707,7 +711,11 @@
           <a:lstStyle/>
           <a:p>
             <a:r>
-              <a:rPr lang="en-US" dirty="0"/>
+              <a:rPr lang="ar-SA" dirty="0">
+                <a:latin typeface="Amiri" pitchFamily="2" charset="-78"/>
+                <a:ea typeface="Amiri" pitchFamily="2" charset="-78"/>
+                <a:cs typeface="Amiri" pitchFamily="2" charset="-78"/>
+              </a:rPr>
               <a:t>ROLE PLAY D (Stretch) — a radio interview.
 SET-UP IN THE BREAKOUT ROOM: A = examiner (reads the left column ONLY — the questions, in order), B = candidate (sees the task column; Core may use the help column), C = observer (ticks the feedback checklist). 1 minute preparation, about 3 minutes speaking, 1 minute feedback, then rotate.
 Task ! is the unexpected question: in the exam the candidate has not seen it — the examiner should read it without warning.
@@ -1243,7 +1251,11 @@
           <a:lstStyle/>
           <a:p>
             <a:r>
-              <a:rPr lang="en-US" dirty="0"/>
+              <a:rPr lang="ar-SA" dirty="0">
+                <a:latin typeface="Amiri" pitchFamily="2" charset="-78"/>
+                <a:ea typeface="Amiri" pitchFamily="2" charset="-78"/>
+                <a:cs typeface="Amiri" pitchFamily="2" charset="-78"/>
+              </a:rPr>
               <a:t>TOPIC CONVERSATION — Core. Examiner asks the questions in order and may add “لِمَاذَا؟ / هَلْ يُمْكِنُ أَنْ تَشْرَحَ أَكْثَرَ؟” to push for more. Candidate aims for one full sentence per question.
 </a:t>
             </a:r>
@@ -1332,7 +1344,11 @@
           <a:lstStyle/>
           <a:p>
             <a:r>
-              <a:rPr lang="en-US" dirty="0"/>
+              <a:rPr lang="ar-SA" dirty="0">
+                <a:latin typeface="Amiri" pitchFamily="2" charset="-78"/>
+                <a:ea typeface="Amiri" pitchFamily="2" charset="-78"/>
+                <a:cs typeface="Amiri" pitchFamily="2" charset="-78"/>
+              </a:rPr>
               <a:t>TOPIC CONVERSATION — Develop. Examiner asks the questions in order and may add “لِمَاذَا؟ / هَلْ يُمْكِنُ أَنْ تَشْرَحَ أَكْثَرَ؟” to push for more. Candidate aims for two or three sentences, with a comparison and a past detail.
 </a:t>
             </a:r>
@@ -1421,7 +1437,11 @@
           <a:lstStyle/>
           <a:p>
             <a:r>
-              <a:rPr lang="en-US" dirty="0"/>
+              <a:rPr lang="ar-SA" dirty="0">
+                <a:latin typeface="Amiri" pitchFamily="2" charset="-78"/>
+                <a:ea typeface="Amiri" pitchFamily="2" charset="-78"/>
+                <a:cs typeface="Amiri" pitchFamily="2" charset="-78"/>
+              </a:rPr>
               <a:t>TOPIC CONVERSATION — Stretch. Examiner asks the questions in order and may add “لِمَاذَا؟ / هَلْ يُمْكِنُ أَنْ تَشْرَحَ أَكْثَرَ؟” to push for more. Candidate aims for a developed answer: opinion, comparison, concession and a conditional.
 </a:t>
             </a:r>
@@ -1510,7 +1530,11 @@
           <a:lstStyle/>
           <a:p>
             <a:r>
-              <a:rPr lang="en-US" dirty="0"/>
+              <a:rPr lang="ar-SA" dirty="0">
+                <a:latin typeface="Amiri" pitchFamily="2" charset="-78"/>
+                <a:ea typeface="Amiri" pitchFamily="2" charset="-78"/>
+                <a:cs typeface="Amiri" pitchFamily="2" charset="-78"/>
+              </a:rPr>
               <a:t>WELCOME (1 min) — while students join.
 • Greet each student by name as they arrive: السَّلَامُ عَلَيْكُمْ. Take the register (Pastoral Tracker: attendance 0/1).
 • 2-MINUTE CHECK-IN (SEND training): a private chat to any student who seemed unsettled last lesson — “Are you okay today? 👍 / 👎”.
@@ -2224,7 +2248,11 @@
           <a:lstStyle/>
           <a:p>
             <a:r>
-              <a:rPr lang="en-US" dirty="0"/>
+              <a:rPr lang="ar-SA" dirty="0">
+                <a:latin typeface="Amiri" pitchFamily="2" charset="-78"/>
+                <a:ea typeface="Amiri" pitchFamily="2" charset="-78"/>
+                <a:cs typeface="Amiri" pitchFamily="2" charset="-78"/>
+              </a:rPr>
               <a:t>TEACH (3 min). Role play = precise and complete; conversation = develop. Choral repetition of the repair phrases. To a girl: تُعِيدِي.</a:t>
             </a:r>
             <a:endParaRPr lang="en-US" dirty="0"/>
@@ -2312,7 +2340,11 @@
           <a:lstStyle/>
           <a:p>
             <a:r>
-              <a:rPr lang="en-US" dirty="0"/>
+              <a:rPr lang="ar-SA" dirty="0">
+                <a:latin typeface="Amiri" pitchFamily="2" charset="-78"/>
+                <a:ea typeface="Amiri" pitchFamily="2" charset="-78"/>
+                <a:cs typeface="Amiri" pitchFamily="2" charset="-78"/>
+              </a:rPr>
               <a:t>LANGUAGE BANK (2 min) — al-jaww is masculine: al-jawwu ḥārr; al-ayyām (non-human pl.) → mushmisa. Weather verbs are feminine because the subjects are non-human plurals: تَسْقُطُ الأَمْطَارُ · تَهُبُّ الرِّيَاحُ.</a:t>
             </a:r>
             <a:endParaRPr lang="en-US" dirty="0"/>
@@ -2400,7 +2432,11 @@
           <a:lstStyle/>
           <a:p>
             <a:r>
-              <a:rPr lang="en-US" dirty="0"/>
+              <a:rPr lang="ar-SA" dirty="0">
+                <a:latin typeface="Amiri" pitchFamily="2" charset="-78"/>
+                <a:ea typeface="Amiri" pitchFamily="2" charset="-78"/>
+                <a:cs typeface="Amiri" pitchFamily="2" charset="-78"/>
+              </a:rPr>
               <a:t>LANGUAGE BANK (2 min) — comparatives: أَحَرُّ مِنْ · أَبْرَدُ مِنْ · أَكْثَرُ مَطَرًا مِنْ. Future: سَيَكُونُ الجَوُّ … · سَتَسْقُطُ الأَمْطَارُ · مِنَ المُتَوَقَّعِ أَنْ تَرْتَفِعَ دَرَجَاتُ الحَرَارَةِ.</a:t>
             </a:r>
             <a:endParaRPr lang="en-US" dirty="0"/>
@@ -2576,7 +2612,11 @@
           <a:lstStyle/>
           <a:p>
             <a:r>
-              <a:rPr lang="en-US" dirty="0"/>
+              <a:rPr lang="ar-SA" dirty="0">
+                <a:latin typeface="Amiri" pitchFamily="2" charset="-78"/>
+                <a:ea typeface="Amiri" pitchFamily="2" charset="-78"/>
+                <a:cs typeface="Amiri" pitchFamily="2" charset="-78"/>
+              </a:rPr>
               <a:t>ROLE PLAY A (Core) — a phone call.
 SET-UP IN THE BREAKOUT ROOM: A = examiner (reads the left column ONLY — the questions, in order), B = candidate (sees the task column; Core may use the help column), C = observer (ticks the feedback checklist). 1 minute preparation, about 3 minutes speaking, 1 minute feedback, then rotate.
 Task ! is the unexpected question: in the exam the candidate has not seen it — the examiner should read it without warning.
@@ -2668,7 +2708,11 @@
           <a:lstStyle/>
           <a:p>
             <a:r>
-              <a:rPr lang="en-US" dirty="0"/>
+              <a:rPr lang="ar-SA" dirty="0">
+                <a:latin typeface="Amiri" pitchFamily="2" charset="-78"/>
+                <a:ea typeface="Amiri" pitchFamily="2" charset="-78"/>
+                <a:cs typeface="Amiri" pitchFamily="2" charset="-78"/>
+              </a:rPr>
               <a:t>ROLE PLAY B (Core+) — packing for a trip.
 SET-UP IN THE BREAKOUT ROOM: A = examiner (reads the left column ONLY — the questions, in order), B = candidate (sees the task column; Core may use the help column), C = observer (ticks the feedback checklist). 1 minute preparation, about 3 minutes speaking, 1 minute feedback, then rotate.
 Task ! is the unexpected question: in the exam the candidate has not seen it — the examiner should read it without warning.
@@ -3156,6 +3200,7 @@
                   <a:srgbClr val="D4AF37"/>
                 </a:solidFill>
                 <a:latin typeface="Amiri" pitchFamily="2" charset="-78"/>
+                <a:ea typeface="Amiri" pitchFamily="2" charset="-78"/>
                 <a:cs typeface="Amiri" pitchFamily="2" charset="-78"/>
               </a:rPr>
               <a:t>م</a:t>
@@ -3362,6 +3407,7 @@
                   <a:srgbClr val="D4AF37"/>
                 </a:solidFill>
                 <a:latin typeface="Amiri" pitchFamily="2" charset="-78"/>
+                <a:ea typeface="Amiri" pitchFamily="2" charset="-78"/>
                 <a:cs typeface="Amiri" pitchFamily="2" charset="-78"/>
               </a:rPr>
               <a:t>وَرْشَةُ التَّحَدُّثِ — الطَّقْسُ وَالفُصُولُ</a:t>
@@ -3413,6 +3459,7 @@
                   <a:srgbClr val="C6D2E6"/>
                 </a:solidFill>
                 <a:latin typeface="Amiri" pitchFamily="2" charset="-78"/>
+                <a:ea typeface="Amiri" pitchFamily="2" charset="-78"/>
                 <a:cs typeface="Amiri" pitchFamily="2" charset="-78"/>
               </a:rPr>
               <a:t>أَبْرَدُ مِنْ</a:t>
@@ -3439,6 +3486,7 @@
                   <a:srgbClr val="C6D2E6"/>
                 </a:solidFill>
                 <a:latin typeface="Amiri" pitchFamily="2" charset="-78"/>
+                <a:ea typeface="Amiri" pitchFamily="2" charset="-78"/>
                 <a:cs typeface="Amiri" pitchFamily="2" charset="-78"/>
               </a:rPr>
               <a:t>أَكْثَرُ حَرَارَةً مِنْ</a:t>
@@ -3871,6 +3919,7 @@
                   <a:srgbClr val="D4AF37"/>
                 </a:solidFill>
                 <a:latin typeface="Amiri" pitchFamily="2" charset="-78"/>
+                <a:ea typeface="Amiri" pitchFamily="2" charset="-78"/>
                 <a:cs typeface="Amiri" pitchFamily="2" charset="-78"/>
               </a:rPr>
               <a:t>م</a:t>
@@ -4191,6 +4240,7 @@
                   <a:srgbClr val="8A6D1E"/>
                 </a:solidFill>
                 <a:latin typeface="Amiri" pitchFamily="2" charset="-78"/>
+                <a:ea typeface="Amiri" pitchFamily="2" charset="-78"/>
                 <a:cs typeface="Amiri" pitchFamily="2" charset="-78"/>
               </a:rPr>
               <a:t>عِنْدَمَا أَفْسَدَ الطَّقْسُ الرِّحْلَةَ</a:t>
@@ -4471,6 +4521,7 @@
                   <a:srgbClr val="1B3B6F"/>
                 </a:solidFill>
                 <a:latin typeface="Amiri" pitchFamily="2" charset="-78"/>
+                <a:ea typeface="Amiri" pitchFamily="2" charset="-78"/>
                 <a:cs typeface="Amiri" pitchFamily="2" charset="-78"/>
               </a:rPr>
               <a:t>كَانَتْ … لِأَنَّ …</a:t>
@@ -4547,6 +4598,7 @@
                   <a:srgbClr val="1B3B6F"/>
                 </a:solidFill>
                 <a:latin typeface="Amiri" pitchFamily="2" charset="-78"/>
+                <a:ea typeface="Amiri" pitchFamily="2" charset="-78"/>
                 <a:cs typeface="Amiri" pitchFamily="2" charset="-78"/>
               </a:rPr>
               <a:t>كَيْفَ كَانَتْ رِحْلَتُكَ إِلَى اسْكُتْلَنْدَا؟</a:t>
@@ -4650,6 +4702,7 @@
                   <a:srgbClr val="1B3B6F"/>
                 </a:solidFill>
                 <a:latin typeface="Amiri" pitchFamily="2" charset="-78"/>
+                <a:ea typeface="Amiri" pitchFamily="2" charset="-78"/>
                 <a:cs typeface="Amiri" pitchFamily="2" charset="-78"/>
               </a:rPr>
               <a:t>فِي الصَّبَاحِ … ثُمَّ …</a:t>
@@ -4726,6 +4779,7 @@
                   <a:srgbClr val="1B3B6F"/>
                 </a:solidFill>
                 <a:latin typeface="Amiri" pitchFamily="2" charset="-78"/>
+                <a:ea typeface="Amiri" pitchFamily="2" charset="-78"/>
                 <a:cs typeface="Amiri" pitchFamily="2" charset="-78"/>
               </a:rPr>
               <a:t>مَاذَا حَدَثَ بِالضَّبْطِ؟</a:t>
@@ -4829,6 +4883,7 @@
                   <a:srgbClr val="1B3B6F"/>
                 </a:solidFill>
                 <a:latin typeface="Amiri" pitchFamily="2" charset="-78"/>
+                <a:ea typeface="Amiri" pitchFamily="2" charset="-78"/>
                 <a:cs typeface="Amiri" pitchFamily="2" charset="-78"/>
               </a:rPr>
               <a:t>رَجَعْنَا … وَ…</a:t>
@@ -4905,6 +4960,7 @@
                   <a:srgbClr val="1B3B6F"/>
                 </a:solidFill>
                 <a:latin typeface="Amiri" pitchFamily="2" charset="-78"/>
+                <a:ea typeface="Amiri" pitchFamily="2" charset="-78"/>
                 <a:cs typeface="Amiri" pitchFamily="2" charset="-78"/>
               </a:rPr>
               <a:t>وَمَاذَا فَعَلْتُمْ؟</a:t>
@@ -5008,6 +5064,7 @@
                   <a:srgbClr val="1B3B6F"/>
                 </a:solidFill>
                 <a:latin typeface="Amiri" pitchFamily="2" charset="-78"/>
+                <a:ea typeface="Amiri" pitchFamily="2" charset="-78"/>
                 <a:cs typeface="Amiri" pitchFamily="2" charset="-78"/>
               </a:rPr>
               <a:t>… أَبْرَدُ / أَكْثَرُ … مِنْ …</a:t>
@@ -5084,6 +5141,7 @@
                   <a:srgbClr val="1B3B6F"/>
                 </a:solidFill>
                 <a:latin typeface="Amiri" pitchFamily="2" charset="-78"/>
+                <a:ea typeface="Amiri" pitchFamily="2" charset="-78"/>
                 <a:cs typeface="Amiri" pitchFamily="2" charset="-78"/>
               </a:rPr>
               <a:t>هَلْ جَوُّ اسْكُتْلَنْدَا مِثْلُ جَوِّ بِلَادِكَ الأَصْلِيَّةِ؟</a:t>
@@ -5187,6 +5245,7 @@
                   <a:srgbClr val="1B3B6F"/>
                 </a:solidFill>
                 <a:latin typeface="Amiri" pitchFamily="2" charset="-78"/>
+                <a:ea typeface="Amiri" pitchFamily="2" charset="-78"/>
                 <a:cs typeface="Amiri" pitchFamily="2" charset="-78"/>
               </a:rPr>
               <a:t>سَأَعُودُ فِي … لِأَنَّ …</a:t>
@@ -5263,6 +5322,7 @@
                   <a:srgbClr val="1B3B6F"/>
                 </a:solidFill>
                 <a:latin typeface="Amiri" pitchFamily="2" charset="-78"/>
+                <a:ea typeface="Amiri" pitchFamily="2" charset="-78"/>
                 <a:cs typeface="Amiri" pitchFamily="2" charset="-78"/>
               </a:rPr>
               <a:t>مَتَى سَتَعُودُ إِلَى هُنَاكَ؟</a:t>
@@ -5472,6 +5532,7 @@
                   <a:srgbClr val="D4AF37"/>
                 </a:solidFill>
                 <a:latin typeface="Amiri" pitchFamily="2" charset="-78"/>
+                <a:ea typeface="Amiri" pitchFamily="2" charset="-78"/>
                 <a:cs typeface="Amiri" pitchFamily="2" charset="-78"/>
               </a:rPr>
               <a:t>م</a:t>
@@ -5792,6 +5853,7 @@
                   <a:srgbClr val="8A6D1E"/>
                 </a:solidFill>
                 <a:latin typeface="Amiri" pitchFamily="2" charset="-78"/>
+                <a:ea typeface="Amiri" pitchFamily="2" charset="-78"/>
                 <a:cs typeface="Amiri" pitchFamily="2" charset="-78"/>
               </a:rPr>
               <a:t>هَلْ يَتَغَيَّرُ المُنَاخُ؟</a:t>
@@ -6072,6 +6134,7 @@
                   <a:srgbClr val="1B3B6F"/>
                 </a:solidFill>
                 <a:latin typeface="Amiri" pitchFamily="2" charset="-78"/>
+                <a:ea typeface="Amiri" pitchFamily="2" charset="-78"/>
                 <a:cs typeface="Amiri" pitchFamily="2" charset="-78"/>
               </a:rPr>
               <a:t>أَنْشَأْنَاهَا لِكَيْ …</a:t>
@@ -6148,6 +6211,7 @@
                   <a:srgbClr val="1B3B6F"/>
                 </a:solidFill>
                 <a:latin typeface="Amiri" pitchFamily="2" charset="-78"/>
+                <a:ea typeface="Amiri" pitchFamily="2" charset="-78"/>
                 <a:cs typeface="Amiri" pitchFamily="2" charset="-78"/>
               </a:rPr>
               <a:t>لِمَاذَا أَنْشَأْتُمْ مَحَطَّةً لِلطَّقْسِ فِي المَدْرَسَةِ؟</a:t>
@@ -6251,6 +6315,7 @@
                   <a:srgbClr val="1B3B6F"/>
                 </a:solidFill>
                 <a:latin typeface="Amiri" pitchFamily="2" charset="-78"/>
+                <a:ea typeface="Amiri" pitchFamily="2" charset="-78"/>
                 <a:cs typeface="Amiri" pitchFamily="2" charset="-78"/>
               </a:rPr>
               <a:t>لَاحَظْنَا أَنَّ … فَمَثَلًا …</a:t>
@@ -6327,6 +6392,7 @@
                   <a:srgbClr val="1B3B6F"/>
                 </a:solidFill>
                 <a:latin typeface="Amiri" pitchFamily="2" charset="-78"/>
+                <a:ea typeface="Amiri" pitchFamily="2" charset="-78"/>
                 <a:cs typeface="Amiri" pitchFamily="2" charset="-78"/>
               </a:rPr>
               <a:t>وَمَاذَا لَاحَظْتُمْ؟</a:t>
@@ -6430,6 +6496,7 @@
                   <a:srgbClr val="1B3B6F"/>
                 </a:solidFill>
                 <a:latin typeface="Amiri" pitchFamily="2" charset="-78"/>
+                <a:ea typeface="Amiri" pitchFamily="2" charset="-78"/>
                 <a:cs typeface="Amiri" pitchFamily="2" charset="-78"/>
               </a:rPr>
               <a:t>كَانَتِ … تَسْقُطُ … أَمَّا الآنَ …</a:t>
@@ -6506,6 +6573,7 @@
                   <a:srgbClr val="1B3B6F"/>
                 </a:solidFill>
                 <a:latin typeface="Amiri" pitchFamily="2" charset="-78"/>
+                <a:ea typeface="Amiri" pitchFamily="2" charset="-78"/>
                 <a:cs typeface="Amiri" pitchFamily="2" charset="-78"/>
               </a:rPr>
               <a:t>كَيْفَ كَانَ الطَّقْسُ أَيَّامَ أَجْدَادِكُمْ؟</a:t>
@@ -6609,6 +6677,7 @@
                   <a:srgbClr val="1B3B6F"/>
                 </a:solidFill>
                 <a:latin typeface="Amiri" pitchFamily="2" charset="-78"/>
+                <a:ea typeface="Amiri" pitchFamily="2" charset="-78"/>
                 <a:cs typeface="Amiri" pitchFamily="2" charset="-78"/>
               </a:rPr>
               <a:t>صَحِيحٌ أَنَّ … غَيْرَ أَنَّ …</a:t>
@@ -6685,6 +6754,7 @@
                   <a:srgbClr val="1B3B6F"/>
                 </a:solidFill>
                 <a:latin typeface="Amiri" pitchFamily="2" charset="-78"/>
+                <a:ea typeface="Amiri" pitchFamily="2" charset="-78"/>
                 <a:cs typeface="Amiri" pitchFamily="2" charset="-78"/>
               </a:rPr>
               <a:t>يَقُولُ بَعْضُ النَّاسِ إِنَّ هٰذَا طَبِيعِيٌّ.</a:t>
@@ -6788,6 +6858,7 @@
                   <a:srgbClr val="1B3B6F"/>
                 </a:solidFill>
                 <a:latin typeface="Amiri" pitchFamily="2" charset="-78"/>
+                <a:ea typeface="Amiri" pitchFamily="2" charset="-78"/>
                 <a:cs typeface="Amiri" pitchFamily="2" charset="-78"/>
               </a:rPr>
               <a:t>مِنَ المُتَوَقَّعِ أَنْ … وَإِذَا لَمْ … فَسَتَزْدَادُ …</a:t>
@@ -6864,6 +6935,7 @@
                   <a:srgbClr val="1B3B6F"/>
                 </a:solidFill>
                 <a:latin typeface="Amiri" pitchFamily="2" charset="-78"/>
+                <a:ea typeface="Amiri" pitchFamily="2" charset="-78"/>
                 <a:cs typeface="Amiri" pitchFamily="2" charset="-78"/>
               </a:rPr>
               <a:t>كَيْفَ سَيَكُونُ الطَّقْسُ بَعْدَ خَمْسِينَ سَنَةً؟</a:t>
@@ -7073,6 +7145,7 @@
                   <a:srgbClr val="D4AF37"/>
                 </a:solidFill>
                 <a:latin typeface="Amiri" pitchFamily="2" charset="-78"/>
+                <a:ea typeface="Amiri" pitchFamily="2" charset="-78"/>
                 <a:cs typeface="Amiri" pitchFamily="2" charset="-78"/>
               </a:rPr>
               <a:t>م</a:t>
@@ -7393,6 +7466,7 @@
                   <a:srgbClr val="8A6D1E"/>
                 </a:solidFill>
                 <a:latin typeface="Amiri" pitchFamily="2" charset="-78"/>
+                <a:ea typeface="Amiri" pitchFamily="2" charset="-78"/>
                 <a:cs typeface="Amiri" pitchFamily="2" charset="-78"/>
               </a:rPr>
               <a:t>وَرَقَةُ المُلَاحِظِ</a:t>
@@ -8863,6 +8937,7 @@
                   <a:srgbClr val="D4AF37"/>
                 </a:solidFill>
                 <a:latin typeface="Amiri" pitchFamily="2" charset="-78"/>
+                <a:ea typeface="Amiri" pitchFamily="2" charset="-78"/>
                 <a:cs typeface="Amiri" pitchFamily="2" charset="-78"/>
               </a:rPr>
               <a:t>م</a:t>
@@ -9183,6 +9258,7 @@
                   <a:srgbClr val="8A6D1E"/>
                 </a:solidFill>
                 <a:latin typeface="Amiri" pitchFamily="2" charset="-78"/>
+                <a:ea typeface="Amiri" pitchFamily="2" charset="-78"/>
                 <a:cs typeface="Amiri" pitchFamily="2" charset="-78"/>
               </a:rPr>
               <a:t>نَمُوذَجُ الإِجَابَةِ</a:t>
@@ -9425,6 +9501,7 @@
                   <a:srgbClr val="1B3B6F"/>
                 </a:solidFill>
                 <a:latin typeface="Amiri" pitchFamily="2" charset="-78"/>
+                <a:ea typeface="Amiri" pitchFamily="2" charset="-78"/>
                 <a:cs typeface="Amiri" pitchFamily="2" charset="-78"/>
               </a:rPr>
               <a:t>الجَوُّ اليَوْمَ بَارِدٌ وَغَائِمٌ.</a:t>
@@ -9501,6 +9578,7 @@
                   <a:srgbClr val="1B3B6F"/>
                 </a:solidFill>
                 <a:latin typeface="Amiri" pitchFamily="2" charset="-78"/>
+                <a:ea typeface="Amiri" pitchFamily="2" charset="-78"/>
                 <a:cs typeface="Amiri" pitchFamily="2" charset="-78"/>
               </a:rPr>
               <a:t>كَيْفَ الجَوُّ عِنْدَكُمُ اليَوْمَ؟</a:t>
@@ -9604,6 +9682,7 @@
                   <a:srgbClr val="1B3B6F"/>
                 </a:solidFill>
                 <a:latin typeface="Amiri" pitchFamily="2" charset="-78"/>
+                <a:ea typeface="Amiri" pitchFamily="2" charset="-78"/>
                 <a:cs typeface="Amiri" pitchFamily="2" charset="-78"/>
               </a:rPr>
               <a:t>نَعَمْ، تَسْقُطُ الأَمْطَارُ مُنْذُ الصَّبَاحِ.</a:t>
@@ -9680,6 +9759,7 @@
                   <a:srgbClr val="1B3B6F"/>
                 </a:solidFill>
                 <a:latin typeface="Amiri" pitchFamily="2" charset="-78"/>
+                <a:ea typeface="Amiri" pitchFamily="2" charset="-78"/>
                 <a:cs typeface="Amiri" pitchFamily="2" charset="-78"/>
               </a:rPr>
               <a:t>هَلْ تَسْقُطُ الأَمْطَارُ؟</a:t>
@@ -9783,6 +9863,7 @@
                   <a:srgbClr val="1B3B6F"/>
                 </a:solidFill>
                 <a:latin typeface="Amiri" pitchFamily="2" charset="-78"/>
+                <a:ea typeface="Amiri" pitchFamily="2" charset="-78"/>
                 <a:cs typeface="Amiri" pitchFamily="2" charset="-78"/>
               </a:rPr>
               <a:t>دَرَجَةُ الحَرَارَةِ خَمْسُ دَرَجَاتٍ فَقَطْ.</a:t>
@@ -9859,6 +9940,7 @@
                   <a:srgbClr val="1B3B6F"/>
                 </a:solidFill>
                 <a:latin typeface="Amiri" pitchFamily="2" charset="-78"/>
+                <a:ea typeface="Amiri" pitchFamily="2" charset="-78"/>
                 <a:cs typeface="Amiri" pitchFamily="2" charset="-78"/>
               </a:rPr>
               <a:t>كَمْ دَرَجَةُ الحَرَارَةِ؟</a:t>
@@ -9962,6 +10044,7 @@
                   <a:srgbClr val="1B3B6F"/>
                 </a:solidFill>
                 <a:latin typeface="Amiri" pitchFamily="2" charset="-78"/>
+                <a:ea typeface="Amiri" pitchFamily="2" charset="-78"/>
                 <a:cs typeface="Amiri" pitchFamily="2" charset="-78"/>
               </a:rPr>
               <a:t>كَمْ دَرَجَةُ الحَرَارَةِ عِنْدَكُمْ؟</a:t>
@@ -10038,6 +10121,7 @@
                   <a:srgbClr val="1B3B6F"/>
                 </a:solidFill>
                 <a:latin typeface="Amiri" pitchFamily="2" charset="-78"/>
+                <a:ea typeface="Amiri" pitchFamily="2" charset="-78"/>
                 <a:cs typeface="Amiri" pitchFamily="2" charset="-78"/>
               </a:rPr>
               <a:t>عِنْدَنَا الجَوُّ حَارٌّ جِدًّا!</a:t>
@@ -10141,6 +10225,7 @@
                   <a:srgbClr val="1B3B6F"/>
                 </a:solidFill>
                 <a:latin typeface="Amiri" pitchFamily="2" charset="-78"/>
+                <a:ea typeface="Amiri" pitchFamily="2" charset="-78"/>
                 <a:cs typeface="Amiri" pitchFamily="2" charset="-78"/>
               </a:rPr>
               <a:t>فَصْلِيَ المُفَضَّلُ الرَّبِيعُ، لِأَنَّ الجَوَّ مُعْتَدِلٌ.</a:t>
@@ -10217,6 +10302,7 @@
                   <a:srgbClr val="1B3B6F"/>
                 </a:solidFill>
                 <a:latin typeface="Amiri" pitchFamily="2" charset="-78"/>
+                <a:ea typeface="Amiri" pitchFamily="2" charset="-78"/>
                 <a:cs typeface="Amiri" pitchFamily="2" charset="-78"/>
               </a:rPr>
               <a:t>مَا فَصْلُكَ المُفَضَّلُ؟</a:t>
@@ -10426,6 +10512,7 @@
                   <a:srgbClr val="D4AF37"/>
                 </a:solidFill>
                 <a:latin typeface="Amiri" pitchFamily="2" charset="-78"/>
+                <a:ea typeface="Amiri" pitchFamily="2" charset="-78"/>
                 <a:cs typeface="Amiri" pitchFamily="2" charset="-78"/>
               </a:rPr>
               <a:t>م</a:t>
@@ -10746,6 +10833,7 @@
                   <a:srgbClr val="8A6D1E"/>
                 </a:solidFill>
                 <a:latin typeface="Amiri" pitchFamily="2" charset="-78"/>
+                <a:ea typeface="Amiri" pitchFamily="2" charset="-78"/>
                 <a:cs typeface="Amiri" pitchFamily="2" charset="-78"/>
               </a:rPr>
               <a:t>نَمُوذَجُ الإِجَابَةِ</a:t>
@@ -10988,6 +11076,7 @@
                   <a:srgbClr val="1B3B6F"/>
                 </a:solidFill>
                 <a:latin typeface="Amiri" pitchFamily="2" charset="-78"/>
+                <a:ea typeface="Amiri" pitchFamily="2" charset="-78"/>
                 <a:cs typeface="Amiri" pitchFamily="2" charset="-78"/>
               </a:rPr>
               <a:t>أُسَافِرُ إِلَى تُونِسَ، وَالجَوُّ هُنَاكَ حَارٌّ وَمُشْمِسٌ.</a:t>
@@ -11064,6 +11153,7 @@
                   <a:srgbClr val="1B3B6F"/>
                 </a:solidFill>
                 <a:latin typeface="Amiri" pitchFamily="2" charset="-78"/>
+                <a:ea typeface="Amiri" pitchFamily="2" charset="-78"/>
                 <a:cs typeface="Amiri" pitchFamily="2" charset="-78"/>
               </a:rPr>
               <a:t>إِلَى أَيْنَ تُسَافِرُ؟ وَكَيْفَ الجَوُّ هُنَاكَ؟</a:t>
@@ -11167,6 +11257,7 @@
                   <a:srgbClr val="1B3B6F"/>
                 </a:solidFill>
                 <a:latin typeface="Amiri" pitchFamily="2" charset="-78"/>
+                <a:ea typeface="Amiri" pitchFamily="2" charset="-78"/>
                 <a:cs typeface="Amiri" pitchFamily="2" charset="-78"/>
               </a:rPr>
               <a:t>سَآخُذُ قُمْصَانًا خَفِيفَةً وَنَظَّارَةً شَمْسِيَّةً.</a:t>
@@ -11243,6 +11334,7 @@
                   <a:srgbClr val="1B3B6F"/>
                 </a:solidFill>
                 <a:latin typeface="Amiri" pitchFamily="2" charset="-78"/>
+                <a:ea typeface="Amiri" pitchFamily="2" charset="-78"/>
                 <a:cs typeface="Amiri" pitchFamily="2" charset="-78"/>
               </a:rPr>
               <a:t>مَاذَا سَتَأْخُذُ مِنْ مَلَابِسَ؟</a:t>
@@ -11346,6 +11438,7 @@
                   <a:srgbClr val="1B3B6F"/>
                 </a:solidFill>
                 <a:latin typeface="Amiri" pitchFamily="2" charset="-78"/>
+                <a:ea typeface="Amiri" pitchFamily="2" charset="-78"/>
                 <a:cs typeface="Amiri" pitchFamily="2" charset="-78"/>
               </a:rPr>
               <a:t>مَاذَا تَقُولُ النَّشْرَةُ الجَوِّيَّةُ عَنِ الأُسْبُوعِ القَادِمِ؟</a:t>
@@ -11422,6 +11515,7 @@
                   <a:srgbClr val="1B3B6F"/>
                 </a:solidFill>
                 <a:latin typeface="Amiri" pitchFamily="2" charset="-78"/>
+                <a:ea typeface="Amiri" pitchFamily="2" charset="-78"/>
                 <a:cs typeface="Amiri" pitchFamily="2" charset="-78"/>
               </a:rPr>
               <a:t>لٰكِنْ قَدْ تَتَغَيَّرُ الأَحْوَالُ الجَوِّيَّةُ.</a:t>
@@ -11525,6 +11619,7 @@
                   <a:srgbClr val="1B3B6F"/>
                 </a:solidFill>
                 <a:latin typeface="Amiri" pitchFamily="2" charset="-78"/>
+                <a:ea typeface="Amiri" pitchFamily="2" charset="-78"/>
                 <a:cs typeface="Amiri" pitchFamily="2" charset="-78"/>
               </a:rPr>
               <a:t>إِذَنْ سَآخُذُ سُتْرَةً، لِأَنَّ اللَّيَالِيَ سَتَكُونُ أَبْرَدَ مِنَ الأَيَّامِ.</a:t>
@@ -11601,6 +11696,7 @@
                   <a:srgbClr val="1B3B6F"/>
                 </a:solidFill>
                 <a:latin typeface="Amiri" pitchFamily="2" charset="-78"/>
+                <a:ea typeface="Amiri" pitchFamily="2" charset="-78"/>
                 <a:cs typeface="Amiri" pitchFamily="2" charset="-78"/>
               </a:rPr>
               <a:t>سَتَهُبُّ رِيَاحٌ قَوِيَّةٌ فِي اللَّيْلِ.</a:t>
@@ -11704,6 +11800,7 @@
                   <a:srgbClr val="1B3B6F"/>
                 </a:solidFill>
                 <a:latin typeface="Amiri" pitchFamily="2" charset="-78"/>
+                <a:ea typeface="Amiri" pitchFamily="2" charset="-78"/>
                 <a:cs typeface="Amiri" pitchFamily="2" charset="-78"/>
               </a:rPr>
               <a:t>نَعَمْ، أُحِبُّ الجَوَّ الحَارَّ أَكْثَرَ، لِأَنِّي أَسْتَطِيعُ أَنْ أَسْبَحَ فِي البَحْرِ.</a:t>
@@ -11780,6 +11877,7 @@
                   <a:srgbClr val="1B3B6F"/>
                 </a:solidFill>
                 <a:latin typeface="Amiri" pitchFamily="2" charset="-78"/>
+                <a:ea typeface="Amiri" pitchFamily="2" charset="-78"/>
                 <a:cs typeface="Amiri" pitchFamily="2" charset="-78"/>
               </a:rPr>
               <a:t>هَلْ تُحِبُّ الجَوَّ الحَارَّ أَكْثَرَ مِنَ الجَوِّ البَارِدِ؟</a:t>
@@ -11989,6 +12087,7 @@
                   <a:srgbClr val="D4AF37"/>
                 </a:solidFill>
                 <a:latin typeface="Amiri" pitchFamily="2" charset="-78"/>
+                <a:ea typeface="Amiri" pitchFamily="2" charset="-78"/>
                 <a:cs typeface="Amiri" pitchFamily="2" charset="-78"/>
               </a:rPr>
               <a:t>م</a:t>
@@ -12309,6 +12408,7 @@
                   <a:srgbClr val="8A6D1E"/>
                 </a:solidFill>
                 <a:latin typeface="Amiri" pitchFamily="2" charset="-78"/>
+                <a:ea typeface="Amiri" pitchFamily="2" charset="-78"/>
                 <a:cs typeface="Amiri" pitchFamily="2" charset="-78"/>
               </a:rPr>
               <a:t>نَمُوذَجُ الإِجَابَةِ</a:t>
@@ -12551,6 +12651,7 @@
                   <a:srgbClr val="1B3B6F"/>
                 </a:solidFill>
                 <a:latin typeface="Amiri" pitchFamily="2" charset="-78"/>
+                <a:ea typeface="Amiri" pitchFamily="2" charset="-78"/>
                 <a:cs typeface="Amiri" pitchFamily="2" charset="-78"/>
               </a:rPr>
               <a:t>كَانَتْ صَعْبَةً قَلِيلًا، لِأَنَّ الطَّقْسَ تَغَيَّرَ فَجْأَةً.</a:t>
@@ -12627,6 +12728,7 @@
                   <a:srgbClr val="1B3B6F"/>
                 </a:solidFill>
                 <a:latin typeface="Amiri" pitchFamily="2" charset="-78"/>
+                <a:ea typeface="Amiri" pitchFamily="2" charset="-78"/>
                 <a:cs typeface="Amiri" pitchFamily="2" charset="-78"/>
               </a:rPr>
               <a:t>كَيْفَ كَانَتْ رِحْلَتُكَ إِلَى اسْكُتْلَنْدَا؟</a:t>
@@ -12730,6 +12832,7 @@
                   <a:srgbClr val="1B3B6F"/>
                 </a:solidFill>
                 <a:latin typeface="Amiri" pitchFamily="2" charset="-78"/>
+                <a:ea typeface="Amiri" pitchFamily="2" charset="-78"/>
                 <a:cs typeface="Amiri" pitchFamily="2" charset="-78"/>
               </a:rPr>
               <a:t>فِي الصَّبَاحِ كَانَتِ الشَّمْسُ مُشْرِقَةً، ثُمَّ هَبَّتْ رِيَاحٌ قَوِيَّةٌ وَسَقَطَتِ الثُّلُوجُ.</a:t>
@@ -12806,6 +12909,7 @@
                   <a:srgbClr val="1B3B6F"/>
                 </a:solidFill>
                 <a:latin typeface="Amiri" pitchFamily="2" charset="-78"/>
+                <a:ea typeface="Amiri" pitchFamily="2" charset="-78"/>
                 <a:cs typeface="Amiri" pitchFamily="2" charset="-78"/>
               </a:rPr>
               <a:t>مَاذَا حَدَثَ بِالضَّبْطِ؟</a:t>
@@ -12909,6 +13013,7 @@
                   <a:srgbClr val="1B3B6F"/>
                 </a:solidFill>
                 <a:latin typeface="Amiri" pitchFamily="2" charset="-78"/>
+                <a:ea typeface="Amiri" pitchFamily="2" charset="-78"/>
                 <a:cs typeface="Amiri" pitchFamily="2" charset="-78"/>
               </a:rPr>
               <a:t>رَجَعْنَا إِلَى الفُنْدُقِ، وَلَعِبْنَا أَلْعَابًا جَمَاعِيَّةً حَتَّى المَسَاءِ.</a:t>
@@ -12985,6 +13090,7 @@
                   <a:srgbClr val="1B3B6F"/>
                 </a:solidFill>
                 <a:latin typeface="Amiri" pitchFamily="2" charset="-78"/>
+                <a:ea typeface="Amiri" pitchFamily="2" charset="-78"/>
                 <a:cs typeface="Amiri" pitchFamily="2" charset="-78"/>
               </a:rPr>
               <a:t>وَمَاذَا فَعَلْتُمْ؟</a:t>
@@ -13088,6 +13194,7 @@
                   <a:srgbClr val="1B3B6F"/>
                 </a:solidFill>
                 <a:latin typeface="Amiri" pitchFamily="2" charset="-78"/>
+                <a:ea typeface="Amiri" pitchFamily="2" charset="-78"/>
                 <a:cs typeface="Amiri" pitchFamily="2" charset="-78"/>
               </a:rPr>
               <a:t>لَا، جَوُّ اسْكُتْلَنْدَا أَبْرَدُ وَأَكْثَرُ مَطَرًا مِنْ جَوِّ مِصْرَ بِكَثِيرٍ.</a:t>
@@ -13164,6 +13271,7 @@
                   <a:srgbClr val="1B3B6F"/>
                 </a:solidFill>
                 <a:latin typeface="Amiri" pitchFamily="2" charset="-78"/>
+                <a:ea typeface="Amiri" pitchFamily="2" charset="-78"/>
                 <a:cs typeface="Amiri" pitchFamily="2" charset="-78"/>
               </a:rPr>
               <a:t>هَلْ جَوُّ اسْكُتْلَنْدَا مِثْلُ جَوِّ بِلَادِكَ الأَصْلِيَّةِ؟</a:t>
@@ -13267,6 +13375,7 @@
                   <a:srgbClr val="1B3B6F"/>
                 </a:solidFill>
                 <a:latin typeface="Amiri" pitchFamily="2" charset="-78"/>
+                <a:ea typeface="Amiri" pitchFamily="2" charset="-78"/>
                 <a:cs typeface="Amiri" pitchFamily="2" charset="-78"/>
               </a:rPr>
               <a:t>سَأَعُودُ فِي الصَّيْفِ، لِأَنَّ الجَوَّ سَيَكُونُ أَدْفَأَ.</a:t>
@@ -13343,6 +13452,7 @@
                   <a:srgbClr val="1B3B6F"/>
                 </a:solidFill>
                 <a:latin typeface="Amiri" pitchFamily="2" charset="-78"/>
+                <a:ea typeface="Amiri" pitchFamily="2" charset="-78"/>
                 <a:cs typeface="Amiri" pitchFamily="2" charset="-78"/>
               </a:rPr>
               <a:t>مَتَى سَتَعُودُ إِلَى هُنَاكَ؟</a:t>
@@ -13552,6 +13662,7 @@
                   <a:srgbClr val="D4AF37"/>
                 </a:solidFill>
                 <a:latin typeface="Amiri" pitchFamily="2" charset="-78"/>
+                <a:ea typeface="Amiri" pitchFamily="2" charset="-78"/>
                 <a:cs typeface="Amiri" pitchFamily="2" charset="-78"/>
               </a:rPr>
               <a:t>م</a:t>
@@ -13872,6 +13983,7 @@
                   <a:srgbClr val="8A6D1E"/>
                 </a:solidFill>
                 <a:latin typeface="Amiri" pitchFamily="2" charset="-78"/>
+                <a:ea typeface="Amiri" pitchFamily="2" charset="-78"/>
                 <a:cs typeface="Amiri" pitchFamily="2" charset="-78"/>
               </a:rPr>
               <a:t>نَمُوذَجُ الإِجَابَةِ</a:t>
@@ -14114,6 +14226,7 @@
                   <a:srgbClr val="1B3B6F"/>
                 </a:solidFill>
                 <a:latin typeface="Amiri" pitchFamily="2" charset="-78"/>
+                <a:ea typeface="Amiri" pitchFamily="2" charset="-78"/>
                 <a:cs typeface="Amiri" pitchFamily="2" charset="-78"/>
               </a:rPr>
               <a:t>أَنْشَأْنَاهَا لِكَيْ نُسَجِّلَ دَرَجَاتِ الحَرَارَةِ وَالأَمْطَارَ كُلَّ يَوْمٍ، وَنُقَارِنَهَا بِالسَّنَوَاتِ المَاضِيَةِ.</a:t>
@@ -14190,6 +14303,7 @@
                   <a:srgbClr val="1B3B6F"/>
                 </a:solidFill>
                 <a:latin typeface="Amiri" pitchFamily="2" charset="-78"/>
+                <a:ea typeface="Amiri" pitchFamily="2" charset="-78"/>
                 <a:cs typeface="Amiri" pitchFamily="2" charset="-78"/>
               </a:rPr>
               <a:t>لِمَاذَا أَنْشَأْتُمْ مَحَطَّةً لِلطَّقْسِ فِي المَدْرَسَةِ؟</a:t>
@@ -14293,6 +14407,7 @@
                   <a:srgbClr val="1B3B6F"/>
                 </a:solidFill>
                 <a:latin typeface="Amiri" pitchFamily="2" charset="-78"/>
+                <a:ea typeface="Amiri" pitchFamily="2" charset="-78"/>
                 <a:cs typeface="Amiri" pitchFamily="2" charset="-78"/>
               </a:rPr>
               <a:t>لَاحَظْنَا أَنَّ الشِّتَاءَ أَصْبَحَ أَدْفَأَ؛ فَمَثَلًا لَمْ تَسْقُطِ الثُّلُوجُ هُنَا مُنْذُ ثَلَاثِ سَنَوَاتٍ.</a:t>
@@ -14369,6 +14484,7 @@
                   <a:srgbClr val="1B3B6F"/>
                 </a:solidFill>
                 <a:latin typeface="Amiri" pitchFamily="2" charset="-78"/>
+                <a:ea typeface="Amiri" pitchFamily="2" charset="-78"/>
                 <a:cs typeface="Amiri" pitchFamily="2" charset="-78"/>
               </a:rPr>
               <a:t>وَمَاذَا لَاحَظْتُمْ؟</a:t>
@@ -14472,6 +14588,7 @@
                   <a:srgbClr val="1B3B6F"/>
                 </a:solidFill>
                 <a:latin typeface="Amiri" pitchFamily="2" charset="-78"/>
+                <a:ea typeface="Amiri" pitchFamily="2" charset="-78"/>
                 <a:cs typeface="Amiri" pitchFamily="2" charset="-78"/>
               </a:rPr>
               <a:t>يَقُولُ جَدِّي إِنَّ الثُّلُوجَ كَانَتْ تُغَطِّي الشَّوَارِعَ كُلَّ شِتَاءٍ، أَمَّا الآنَ فَالفَيَضَانَاتُ أَكْثَرُ مِنَ الثُّلُوجِ.</a:t>
@@ -14548,6 +14665,7 @@
                   <a:srgbClr val="1B3B6F"/>
                 </a:solidFill>
                 <a:latin typeface="Amiri" pitchFamily="2" charset="-78"/>
+                <a:ea typeface="Amiri" pitchFamily="2" charset="-78"/>
                 <a:cs typeface="Amiri" pitchFamily="2" charset="-78"/>
               </a:rPr>
               <a:t>كَيْفَ كَانَ الطَّقْسُ أَيَّامَ أَجْدَادِكُمْ؟</a:t>
@@ -14651,6 +14769,7 @@
                   <a:srgbClr val="1B3B6F"/>
                 </a:solidFill>
                 <a:latin typeface="Amiri" pitchFamily="2" charset="-78"/>
+                <a:ea typeface="Amiri" pitchFamily="2" charset="-78"/>
                 <a:cs typeface="Amiri" pitchFamily="2" charset="-78"/>
               </a:rPr>
               <a:t>صَحِيحٌ أَنَّ الطَّقْسَ يَتَغَيَّرُ دَائِمًا، غَيْرَ أَنَّ العُلَمَاءَ يُؤَكِّدُونَ أَنَّ التَّغَيُّرَ اليَوْمَ أَسْرَعُ مِنْ أَيِّ وَقْتٍ مَضَى.</a:t>
@@ -14727,6 +14846,7 @@
                   <a:srgbClr val="1B3B6F"/>
                 </a:solidFill>
                 <a:latin typeface="Amiri" pitchFamily="2" charset="-78"/>
+                <a:ea typeface="Amiri" pitchFamily="2" charset="-78"/>
                 <a:cs typeface="Amiri" pitchFamily="2" charset="-78"/>
               </a:rPr>
               <a:t>يَقُولُ بَعْضُ النَّاسِ إِنَّ هٰذَا طَبِيعِيٌّ.</a:t>
@@ -14830,6 +14950,7 @@
                   <a:srgbClr val="1B3B6F"/>
                 </a:solidFill>
                 <a:latin typeface="Amiri" pitchFamily="2" charset="-78"/>
+                <a:ea typeface="Amiri" pitchFamily="2" charset="-78"/>
                 <a:cs typeface="Amiri" pitchFamily="2" charset="-78"/>
               </a:rPr>
               <a:t>مِنَ المُتَوَقَّعِ أَنْ تَرْتَفِعَ دَرَجَاتُ الحَرَارَةِ، وَإِذَا لَمْ نُخَفِّفِ التَّلَوُّثَ، فَسَتَزْدَادُ العَوَاصِفُ وَالفَيَضَانَاتُ.</a:t>
@@ -14906,6 +15027,7 @@
                   <a:srgbClr val="1B3B6F"/>
                 </a:solidFill>
                 <a:latin typeface="Amiri" pitchFamily="2" charset="-78"/>
+                <a:ea typeface="Amiri" pitchFamily="2" charset="-78"/>
                 <a:cs typeface="Amiri" pitchFamily="2" charset="-78"/>
               </a:rPr>
               <a:t>كَيْفَ سَيَكُونُ الطَّقْسُ بَعْدَ خَمْسِينَ سَنَةً؟</a:t>
@@ -15115,6 +15237,7 @@
                   <a:srgbClr val="D4AF37"/>
                 </a:solidFill>
                 <a:latin typeface="Amiri" pitchFamily="2" charset="-78"/>
+                <a:ea typeface="Amiri" pitchFamily="2" charset="-78"/>
                 <a:cs typeface="Amiri" pitchFamily="2" charset="-78"/>
               </a:rPr>
               <a:t>م</a:t>
@@ -15435,6 +15558,7 @@
                   <a:srgbClr val="8A6D1E"/>
                 </a:solidFill>
                 <a:latin typeface="Amiri" pitchFamily="2" charset="-78"/>
+                <a:ea typeface="Amiri" pitchFamily="2" charset="-78"/>
                 <a:cs typeface="Amiri" pitchFamily="2" charset="-78"/>
               </a:rPr>
               <a:t>الطَّقْسُ اليَوْمَ</a:t>
@@ -15715,6 +15839,7 @@
                   <a:srgbClr val="1B3B6F"/>
                 </a:solidFill>
                 <a:latin typeface="Amiri" pitchFamily="2" charset="-78"/>
+                <a:ea typeface="Amiri" pitchFamily="2" charset="-78"/>
                 <a:cs typeface="Amiri" pitchFamily="2" charset="-78"/>
               </a:rPr>
               <a:t>الجَوُّ اليَوْمَ …</a:t>
@@ -15791,6 +15916,7 @@
                   <a:srgbClr val="1B3B6F"/>
                 </a:solidFill>
                 <a:latin typeface="Amiri" pitchFamily="2" charset="-78"/>
+                <a:ea typeface="Amiri" pitchFamily="2" charset="-78"/>
                 <a:cs typeface="Amiri" pitchFamily="2" charset="-78"/>
               </a:rPr>
               <a:t>كَيْفَ الجَوُّ اليَوْمَ؟</a:t>
@@ -15959,6 +16085,7 @@
                   <a:srgbClr val="1B3B6F"/>
                 </a:solidFill>
                 <a:latin typeface="Amiri" pitchFamily="2" charset="-78"/>
+                <a:ea typeface="Amiri" pitchFamily="2" charset="-78"/>
                 <a:cs typeface="Amiri" pitchFamily="2" charset="-78"/>
               </a:rPr>
               <a:t>فَصْلِي المُفَضَّلُ … لِأَنَّ …</a:t>
@@ -16035,6 +16162,7 @@
                   <a:srgbClr val="1B3B6F"/>
                 </a:solidFill>
                 <a:latin typeface="Amiri" pitchFamily="2" charset="-78"/>
+                <a:ea typeface="Amiri" pitchFamily="2" charset="-78"/>
                 <a:cs typeface="Amiri" pitchFamily="2" charset="-78"/>
               </a:rPr>
               <a:t>مَا فَصْلُكَ المُفَضَّلُ؟ وَلِمَاذَا؟</a:t>
@@ -16203,6 +16331,7 @@
                   <a:srgbClr val="1B3B6F"/>
                 </a:solidFill>
                 <a:latin typeface="Amiri" pitchFamily="2" charset="-78"/>
+                <a:ea typeface="Amiri" pitchFamily="2" charset="-78"/>
                 <a:cs typeface="Amiri" pitchFamily="2" charset="-78"/>
               </a:rPr>
               <a:t>فِي الشِّتَاءِ … وَتَسْقُطُ …</a:t>
@@ -16279,6 +16408,7 @@
                   <a:srgbClr val="1B3B6F"/>
                 </a:solidFill>
                 <a:latin typeface="Amiri" pitchFamily="2" charset="-78"/>
+                <a:ea typeface="Amiri" pitchFamily="2" charset="-78"/>
                 <a:cs typeface="Amiri" pitchFamily="2" charset="-78"/>
               </a:rPr>
               <a:t>كَيْفَ الطَّقْسُ فِي الشِّتَاءِ فِي بَرِيطَانْيَا؟</a:t>
@@ -16447,6 +16577,7 @@
                   <a:srgbClr val="1B3B6F"/>
                 </a:solidFill>
                 <a:latin typeface="Amiri" pitchFamily="2" charset="-78"/>
+                <a:ea typeface="Amiri" pitchFamily="2" charset="-78"/>
                 <a:cs typeface="Amiri" pitchFamily="2" charset="-78"/>
               </a:rPr>
               <a:t>أَلْبَسُ …</a:t>
@@ -16523,6 +16654,7 @@
                   <a:srgbClr val="1B3B6F"/>
                 </a:solidFill>
                 <a:latin typeface="Amiri" pitchFamily="2" charset="-78"/>
+                <a:ea typeface="Amiri" pitchFamily="2" charset="-78"/>
                 <a:cs typeface="Amiri" pitchFamily="2" charset="-78"/>
               </a:rPr>
               <a:t>مَاذَا تَلْبَسُ عِنْدَمَا يَكُونُ الجَوُّ بَارِدًا؟</a:t>
@@ -16691,6 +16823,7 @@
                   <a:srgbClr val="1B3B6F"/>
                 </a:solidFill>
                 <a:latin typeface="Amiri" pitchFamily="2" charset="-78"/>
+                <a:ea typeface="Amiri" pitchFamily="2" charset="-78"/>
                 <a:cs typeface="Amiri" pitchFamily="2" charset="-78"/>
               </a:rPr>
               <a:t>عِنْدَمَا تُمْطِرُ، …</a:t>
@@ -16767,6 +16900,7 @@
                   <a:srgbClr val="1B3B6F"/>
                 </a:solidFill>
                 <a:latin typeface="Amiri" pitchFamily="2" charset="-78"/>
+                <a:ea typeface="Amiri" pitchFamily="2" charset="-78"/>
                 <a:cs typeface="Amiri" pitchFamily="2" charset="-78"/>
               </a:rPr>
               <a:t>مَاذَا تَفْعَلُ عِنْدَمَا تُمْطِرُ؟</a:t>
@@ -16921,6 +17055,7 @@
                   <a:srgbClr val="1B3B6F"/>
                 </a:solidFill>
                 <a:latin typeface="Amiri" pitchFamily="2" charset="-78"/>
+                <a:ea typeface="Amiri" pitchFamily="2" charset="-78"/>
                 <a:cs typeface="Amiri" pitchFamily="2" charset="-78"/>
               </a:rPr>
               <a:t>عَفْوًا، هَلْ يُمْكِنُ أَنْ تُعِيدَ السُّؤَالَ؟</a:t>
@@ -17054,6 +17189,7 @@
                   <a:srgbClr val="D4AF37"/>
                 </a:solidFill>
                 <a:latin typeface="Amiri" pitchFamily="2" charset="-78"/>
+                <a:ea typeface="Amiri" pitchFamily="2" charset="-78"/>
                 <a:cs typeface="Amiri" pitchFamily="2" charset="-78"/>
               </a:rPr>
               <a:t>م</a:t>
@@ -17374,6 +17510,7 @@
                   <a:srgbClr val="8A6D1E"/>
                 </a:solidFill>
                 <a:latin typeface="Amiri" pitchFamily="2" charset="-78"/>
+                <a:ea typeface="Amiri" pitchFamily="2" charset="-78"/>
                 <a:cs typeface="Amiri" pitchFamily="2" charset="-78"/>
               </a:rPr>
               <a:t>المُنَاخُ هُنَا وَهُنَاكَ</a:t>
@@ -17654,6 +17791,7 @@
                   <a:srgbClr val="1B3B6F"/>
                 </a:solidFill>
                 <a:latin typeface="Amiri" pitchFamily="2" charset="-78"/>
+                <a:ea typeface="Amiri" pitchFamily="2" charset="-78"/>
                 <a:cs typeface="Amiri" pitchFamily="2" charset="-78"/>
               </a:rPr>
               <a:t>الطَّقْسُ فِي … أَبْرَدُ / أَحَرُّ مِنْ …</a:t>
@@ -17730,6 +17868,7 @@
                   <a:srgbClr val="1B3B6F"/>
                 </a:solidFill>
                 <a:latin typeface="Amiri" pitchFamily="2" charset="-78"/>
+                <a:ea typeface="Amiri" pitchFamily="2" charset="-78"/>
                 <a:cs typeface="Amiri" pitchFamily="2" charset="-78"/>
               </a:rPr>
               <a:t>قَارِنْ بَيْنَ الطَّقْسِ فِي بَرِيطَانْيَا وَفِي بَلَدٍ عَرَبِيٍّ.</a:t>
@@ -17833,6 +17972,7 @@
                   <a:srgbClr val="1B3B6F"/>
                 </a:solidFill>
                 <a:latin typeface="Amiri" pitchFamily="2" charset="-78"/>
+                <a:ea typeface="Amiri" pitchFamily="2" charset="-78"/>
                 <a:cs typeface="Amiri" pitchFamily="2" charset="-78"/>
               </a:rPr>
               <a:t>فِي الشِّتَاءِ المَاضِي هَبَّتْ … فَأُغْلِقَتْ …</a:t>
@@ -17909,6 +18049,7 @@
                   <a:srgbClr val="1B3B6F"/>
                 </a:solidFill>
                 <a:latin typeface="Amiri" pitchFamily="2" charset="-78"/>
+                <a:ea typeface="Amiri" pitchFamily="2" charset="-78"/>
                 <a:cs typeface="Amiri" pitchFamily="2" charset="-78"/>
               </a:rPr>
               <a:t>صِفْ يَوْمًا كَانَ فِيهِ الطَّقْسُ سَيِّئًا جِدًّا.</a:t>
@@ -18012,6 +18153,7 @@
                   <a:srgbClr val="1B3B6F"/>
                 </a:solidFill>
                 <a:latin typeface="Amiri" pitchFamily="2" charset="-78"/>
+                <a:ea typeface="Amiri" pitchFamily="2" charset="-78"/>
                 <a:cs typeface="Amiri" pitchFamily="2" charset="-78"/>
               </a:rPr>
               <a:t>نَعَمْ، عِنْدَمَا … أَشْعُرُ بِالنَّشَاطِ …</a:t>
@@ -18088,6 +18230,7 @@
                   <a:srgbClr val="1B3B6F"/>
                 </a:solidFill>
                 <a:latin typeface="Amiri" pitchFamily="2" charset="-78"/>
+                <a:ea typeface="Amiri" pitchFamily="2" charset="-78"/>
                 <a:cs typeface="Amiri" pitchFamily="2" charset="-78"/>
               </a:rPr>
               <a:t>هَلْ يُؤَثِّرُ الطَّقْسُ فِي مِزَاجِكَ؟</a:t>
@@ -18191,6 +18334,7 @@
                   <a:srgbClr val="1B3B6F"/>
                 </a:solidFill>
                 <a:latin typeface="Amiri" pitchFamily="2" charset="-78"/>
+                <a:ea typeface="Amiri" pitchFamily="2" charset="-78"/>
                 <a:cs typeface="Amiri" pitchFamily="2" charset="-78"/>
               </a:rPr>
               <a:t>فِي الصَّيْفِ … وَفِي الشِّتَاءِ …</a:t>
@@ -18267,6 +18411,7 @@
                   <a:srgbClr val="1B3B6F"/>
                 </a:solidFill>
                 <a:latin typeface="Amiri" pitchFamily="2" charset="-78"/>
+                <a:ea typeface="Amiri" pitchFamily="2" charset="-78"/>
                 <a:cs typeface="Amiri" pitchFamily="2" charset="-78"/>
               </a:rPr>
               <a:t>مَا الأَنْشِطَةُ المُنَاسِبَةُ لِكُلِّ فَصْلٍ؟</a:t>
@@ -18370,6 +18515,7 @@
                   <a:srgbClr val="1B3B6F"/>
                 </a:solidFill>
                 <a:latin typeface="Amiri" pitchFamily="2" charset="-78"/>
+                <a:ea typeface="Amiri" pitchFamily="2" charset="-78"/>
                 <a:cs typeface="Amiri" pitchFamily="2" charset="-78"/>
               </a:rPr>
               <a:t>حَسَبَ النَّشْرَةِ الجَوِّيَّةِ، سَيَكُونُ …</a:t>
@@ -18446,6 +18592,7 @@
                   <a:srgbClr val="1B3B6F"/>
                 </a:solidFill>
                 <a:latin typeface="Amiri" pitchFamily="2" charset="-78"/>
+                <a:ea typeface="Amiri" pitchFamily="2" charset="-78"/>
                 <a:cs typeface="Amiri" pitchFamily="2" charset="-78"/>
               </a:rPr>
               <a:t>كَيْفَ سَيَكُونُ الطَّقْسُ فِي عُطْلَةِ نِهَايَةِ الأُسْبُوعِ؟</a:t>
@@ -18655,6 +18802,7 @@
                   <a:srgbClr val="D4AF37"/>
                 </a:solidFill>
                 <a:latin typeface="Amiri" pitchFamily="2" charset="-78"/>
+                <a:ea typeface="Amiri" pitchFamily="2" charset="-78"/>
                 <a:cs typeface="Amiri" pitchFamily="2" charset="-78"/>
               </a:rPr>
               <a:t>م</a:t>
@@ -18975,6 +19123,7 @@
                   <a:srgbClr val="8A6D1E"/>
                 </a:solidFill>
                 <a:latin typeface="Amiri" pitchFamily="2" charset="-78"/>
+                <a:ea typeface="Amiri" pitchFamily="2" charset="-78"/>
                 <a:cs typeface="Amiri" pitchFamily="2" charset="-78"/>
               </a:rPr>
               <a:t>تَغَيُّرُ المُنَاخِ</a:t>
@@ -19255,6 +19404,7 @@
                   <a:srgbClr val="1B3B6F"/>
                 </a:solidFill>
                 <a:latin typeface="Amiri" pitchFamily="2" charset="-78"/>
+                <a:ea typeface="Amiri" pitchFamily="2" charset="-78"/>
                 <a:cs typeface="Amiri" pitchFamily="2" charset="-78"/>
               </a:rPr>
               <a:t>أَعْتَقِدُ أَنَّ … بِدَلِيلِ أَنَّ …</a:t>
@@ -19331,6 +19481,7 @@
                   <a:srgbClr val="1B3B6F"/>
                 </a:solidFill>
                 <a:latin typeface="Amiri" pitchFamily="2" charset="-78"/>
+                <a:ea typeface="Amiri" pitchFamily="2" charset="-78"/>
                 <a:cs typeface="Amiri" pitchFamily="2" charset="-78"/>
               </a:rPr>
               <a:t>هَلْ تَعْتَقِدُ أَنَّ المُنَاخَ يَتَغَيَّرُ فِعْلًا؟</a:t>
@@ -19434,6 +19585,7 @@
                   <a:srgbClr val="1B3B6F"/>
                 </a:solidFill>
                 <a:latin typeface="Amiri" pitchFamily="2" charset="-78"/>
+                <a:ea typeface="Amiri" pitchFamily="2" charset="-78"/>
                 <a:cs typeface="Amiri" pitchFamily="2" charset="-78"/>
               </a:rPr>
               <a:t>بِسَبَبِ الحَرَارَةِ … مِمَّا …</a:t>
@@ -19510,6 +19662,7 @@
                   <a:srgbClr val="1B3B6F"/>
                 </a:solidFill>
                 <a:latin typeface="Amiri" pitchFamily="2" charset="-78"/>
+                <a:ea typeface="Amiri" pitchFamily="2" charset="-78"/>
                 <a:cs typeface="Amiri" pitchFamily="2" charset="-78"/>
               </a:rPr>
               <a:t>كَيْفَ يُؤَثِّرُ المُنَاخُ فِي حَيَاةِ النَّاسِ فِي البِلَادِ الحَارَّةِ؟</a:t>
@@ -19613,6 +19766,7 @@
                   <a:srgbClr val="1B3B6F"/>
                 </a:solidFill>
                 <a:latin typeface="Amiri" pitchFamily="2" charset="-78"/>
+                <a:ea typeface="Amiri" pitchFamily="2" charset="-78"/>
                 <a:cs typeface="Amiri" pitchFamily="2" charset="-78"/>
               </a:rPr>
               <a:t>صَحِيحٌ أَنَّ … غَيْرَ أَنَّ …</a:t>
@@ -19689,6 +19843,7 @@
                   <a:srgbClr val="1B3B6F"/>
                 </a:solidFill>
                 <a:latin typeface="Amiri" pitchFamily="2" charset="-78"/>
+                <a:ea typeface="Amiri" pitchFamily="2" charset="-78"/>
                 <a:cs typeface="Amiri" pitchFamily="2" charset="-78"/>
               </a:rPr>
               <a:t>أَيُّهُمَا أَصْعَبُ: الحَرُّ الشَّدِيدُ أَمِ البَرْدُ الشَّدِيدُ؟</a:t>
@@ -19792,6 +19947,7 @@
                   <a:srgbClr val="1B3B6F"/>
                 </a:solidFill>
                 <a:latin typeface="Amiri" pitchFamily="2" charset="-78"/>
+                <a:ea typeface="Amiri" pitchFamily="2" charset="-78"/>
                 <a:cs typeface="Amiri" pitchFamily="2" charset="-78"/>
               </a:rPr>
               <a:t>تَقُولُ أُمِّي إِنَّ … كَانَ …</a:t>
@@ -19868,6 +20024,7 @@
                   <a:srgbClr val="1B3B6F"/>
                 </a:solidFill>
                 <a:latin typeface="Amiri" pitchFamily="2" charset="-78"/>
+                <a:ea typeface="Amiri" pitchFamily="2" charset="-78"/>
                 <a:cs typeface="Amiri" pitchFamily="2" charset="-78"/>
               </a:rPr>
               <a:t>كَيْفَ كَانَ الطَّقْسُ فِي طُفُولَةِ وَالِدَيْكَ؟</a:t>
@@ -19971,6 +20128,7 @@
                   <a:srgbClr val="1B3B6F"/>
                 </a:solidFill>
                 <a:latin typeface="Amiri" pitchFamily="2" charset="-78"/>
+                <a:ea typeface="Amiri" pitchFamily="2" charset="-78"/>
                 <a:cs typeface="Amiri" pitchFamily="2" charset="-78"/>
               </a:rPr>
               <a:t>لَوْ كُنْتُ أَسْتَطِيعُ، لَاخْتَرْتُ …</a:t>
@@ -20047,6 +20205,7 @@
                   <a:srgbClr val="1B3B6F"/>
                 </a:solidFill>
                 <a:latin typeface="Amiri" pitchFamily="2" charset="-78"/>
+                <a:ea typeface="Amiri" pitchFamily="2" charset="-78"/>
                 <a:cs typeface="Amiri" pitchFamily="2" charset="-78"/>
               </a:rPr>
               <a:t>لَوْ كُنْتَ تَسْتَطِيعُ أَنْ تَخْتَارَ مُنَاخَ بِلَادِكَ، مَاذَا تَخْتَارُ؟</a:t>
@@ -20256,6 +20415,7 @@
                   <a:srgbClr val="D4AF37"/>
                 </a:solidFill>
                 <a:latin typeface="Amiri" pitchFamily="2" charset="-78"/>
+                <a:ea typeface="Amiri" pitchFamily="2" charset="-78"/>
                 <a:cs typeface="Amiri" pitchFamily="2" charset="-78"/>
               </a:rPr>
               <a:t>م</a:t>
@@ -20576,6 +20736,7 @@
                   <a:srgbClr val="8A6D1E"/>
                 </a:solidFill>
                 <a:latin typeface="Amiri" pitchFamily="2" charset="-78"/>
+                <a:ea typeface="Amiri" pitchFamily="2" charset="-78"/>
                 <a:cs typeface="Amiri" pitchFamily="2" charset="-78"/>
               </a:rPr>
               <a:t>آدَابُ الصَّفِّ</a:t>
@@ -22107,6 +22268,7 @@
                   <a:srgbClr val="D4AF37"/>
                 </a:solidFill>
                 <a:latin typeface="Amiri" pitchFamily="2" charset="-78"/>
+                <a:ea typeface="Amiri" pitchFamily="2" charset="-78"/>
                 <a:cs typeface="Amiri" pitchFamily="2" charset="-78"/>
               </a:rPr>
               <a:t>م</a:t>
@@ -22427,6 +22589,7 @@
                   <a:srgbClr val="8A6D1E"/>
                 </a:solidFill>
                 <a:latin typeface="Amiri" pitchFamily="2" charset="-78"/>
+                <a:ea typeface="Amiri" pitchFamily="2" charset="-78"/>
                 <a:cs typeface="Amiri" pitchFamily="2" charset="-78"/>
               </a:rPr>
               <a:t>نَمُوذَجُ الإِجَابَةِ</a:t>
@@ -22669,6 +22832,7 @@
                   <a:srgbClr val="1B3B6F"/>
                 </a:solidFill>
                 <a:latin typeface="Amiri" pitchFamily="2" charset="-78"/>
+                <a:ea typeface="Amiri" pitchFamily="2" charset="-78"/>
                 <a:cs typeface="Amiri" pitchFamily="2" charset="-78"/>
               </a:rPr>
               <a:t>الجَوُّ اليَوْمَ مُشْمِسٌ وَلٰكِنَّهُ بَارِدٌ.</a:t>
@@ -22745,6 +22909,7 @@
                   <a:srgbClr val="1B3B6F"/>
                 </a:solidFill>
                 <a:latin typeface="Amiri" pitchFamily="2" charset="-78"/>
+                <a:ea typeface="Amiri" pitchFamily="2" charset="-78"/>
                 <a:cs typeface="Amiri" pitchFamily="2" charset="-78"/>
               </a:rPr>
               <a:t>كَيْفَ الجَوُّ اليَوْمَ؟</a:t>
@@ -22848,6 +23013,7 @@
                   <a:srgbClr val="1B3B6F"/>
                 </a:solidFill>
                 <a:latin typeface="Amiri" pitchFamily="2" charset="-78"/>
+                <a:ea typeface="Amiri" pitchFamily="2" charset="-78"/>
                 <a:cs typeface="Amiri" pitchFamily="2" charset="-78"/>
               </a:rPr>
               <a:t>فَصْلِيَ المُفَضَّلُ الصَّيْفُ، لِأَنَّ الأَيَّامَ طَوِيلَةٌ وَمُشْمِسَةٌ.</a:t>
@@ -22924,6 +23090,7 @@
                   <a:srgbClr val="1B3B6F"/>
                 </a:solidFill>
                 <a:latin typeface="Amiri" pitchFamily="2" charset="-78"/>
+                <a:ea typeface="Amiri" pitchFamily="2" charset="-78"/>
                 <a:cs typeface="Amiri" pitchFamily="2" charset="-78"/>
               </a:rPr>
               <a:t>مَا فَصْلُكَ المُفَضَّلُ؟ وَلِمَاذَا؟</a:t>
@@ -23027,6 +23194,7 @@
                   <a:srgbClr val="1B3B6F"/>
                 </a:solidFill>
                 <a:latin typeface="Amiri" pitchFamily="2" charset="-78"/>
+                <a:ea typeface="Amiri" pitchFamily="2" charset="-78"/>
                 <a:cs typeface="Amiri" pitchFamily="2" charset="-78"/>
               </a:rPr>
               <a:t>فِي الشِّتَاءِ الجَوُّ بَارِدٌ، وَتَسْقُطُ الأَمْطَارُ كَثِيرًا.</a:t>
@@ -23103,6 +23271,7 @@
                   <a:srgbClr val="1B3B6F"/>
                 </a:solidFill>
                 <a:latin typeface="Amiri" pitchFamily="2" charset="-78"/>
+                <a:ea typeface="Amiri" pitchFamily="2" charset="-78"/>
                 <a:cs typeface="Amiri" pitchFamily="2" charset="-78"/>
               </a:rPr>
               <a:t>كَيْفَ الطَّقْسُ فِي الشِّتَاءِ فِي بَرِيطَانْيَا؟</a:t>
@@ -23206,6 +23375,7 @@
                   <a:srgbClr val="1B3B6F"/>
                 </a:solidFill>
                 <a:latin typeface="Amiri" pitchFamily="2" charset="-78"/>
+                <a:ea typeface="Amiri" pitchFamily="2" charset="-78"/>
                 <a:cs typeface="Amiri" pitchFamily="2" charset="-78"/>
               </a:rPr>
               <a:t>أَلْبَسُ مِعْطَفًا ثَقِيلًا وَقُبَّعَةً صُوفِيَّةً.</a:t>
@@ -23282,6 +23452,7 @@
                   <a:srgbClr val="1B3B6F"/>
                 </a:solidFill>
                 <a:latin typeface="Amiri" pitchFamily="2" charset="-78"/>
+                <a:ea typeface="Amiri" pitchFamily="2" charset="-78"/>
                 <a:cs typeface="Amiri" pitchFamily="2" charset="-78"/>
               </a:rPr>
               <a:t>مَاذَا تَلْبَسُ عِنْدَمَا يَكُونُ الجَوُّ بَارِدًا؟</a:t>
@@ -23385,6 +23556,7 @@
                   <a:srgbClr val="1B3B6F"/>
                 </a:solidFill>
                 <a:latin typeface="Amiri" pitchFamily="2" charset="-78"/>
+                <a:ea typeface="Amiri" pitchFamily="2" charset="-78"/>
                 <a:cs typeface="Amiri" pitchFamily="2" charset="-78"/>
               </a:rPr>
               <a:t>عِنْدَمَا تُمْطِرُ، أَبْقَى فِي البَيْتِ وَأَقْرَأُ.</a:t>
@@ -23461,6 +23633,7 @@
                   <a:srgbClr val="1B3B6F"/>
                 </a:solidFill>
                 <a:latin typeface="Amiri" pitchFamily="2" charset="-78"/>
+                <a:ea typeface="Amiri" pitchFamily="2" charset="-78"/>
                 <a:cs typeface="Amiri" pitchFamily="2" charset="-78"/>
               </a:rPr>
               <a:t>مَاذَا تَفْعَلُ عِنْدَمَا تُمْطِرُ؟</a:t>
@@ -23670,6 +23843,7 @@
                   <a:srgbClr val="D4AF37"/>
                 </a:solidFill>
                 <a:latin typeface="Amiri" pitchFamily="2" charset="-78"/>
+                <a:ea typeface="Amiri" pitchFamily="2" charset="-78"/>
                 <a:cs typeface="Amiri" pitchFamily="2" charset="-78"/>
               </a:rPr>
               <a:t>م</a:t>
@@ -23990,6 +24164,7 @@
                   <a:srgbClr val="8A6D1E"/>
                 </a:solidFill>
                 <a:latin typeface="Amiri" pitchFamily="2" charset="-78"/>
+                <a:ea typeface="Amiri" pitchFamily="2" charset="-78"/>
                 <a:cs typeface="Amiri" pitchFamily="2" charset="-78"/>
               </a:rPr>
               <a:t>نَمُوذَجُ الإِجَابَةِ</a:t>
@@ -24232,6 +24407,7 @@
                   <a:srgbClr val="1B3B6F"/>
                 </a:solidFill>
                 <a:latin typeface="Amiri" pitchFamily="2" charset="-78"/>
+                <a:ea typeface="Amiri" pitchFamily="2" charset="-78"/>
                 <a:cs typeface="Amiri" pitchFamily="2" charset="-78"/>
               </a:rPr>
               <a:t>الطَّقْسُ فِي بَرِيطَانْيَا أَبْرَدُ وَأَكْثَرُ مَطَرًا، أَمَّا فِي السُّعُودِيَّةِ فَالصَّيْفُ حَارٌّ جِدًّا وَالأَمْطَارُ قَلِيلَةٌ.</a:t>
@@ -24308,6 +24484,7 @@
                   <a:srgbClr val="1B3B6F"/>
                 </a:solidFill>
                 <a:latin typeface="Amiri" pitchFamily="2" charset="-78"/>
+                <a:ea typeface="Amiri" pitchFamily="2" charset="-78"/>
                 <a:cs typeface="Amiri" pitchFamily="2" charset="-78"/>
               </a:rPr>
               <a:t>قَارِنْ بَيْنَ الطَّقْسِ فِي بَرِيطَانْيَا وَفِي بَلَدٍ عَرَبِيٍّ.</a:t>
@@ -24411,6 +24588,7 @@
                   <a:srgbClr val="1B3B6F"/>
                 </a:solidFill>
                 <a:latin typeface="Amiri" pitchFamily="2" charset="-78"/>
+                <a:ea typeface="Amiri" pitchFamily="2" charset="-78"/>
                 <a:cs typeface="Amiri" pitchFamily="2" charset="-78"/>
               </a:rPr>
               <a:t>فِي الشِّتَاءِ المَاضِي هَبَّتْ عَاصِفَةٌ قَوِيَّةٌ، فَأُغْلِقَتِ المَدْرَسَةُ، وَبَقِينَا فِي البَيْتِ يَوْمَيْنِ.</a:t>
@@ -24487,6 +24665,7 @@
                   <a:srgbClr val="1B3B6F"/>
                 </a:solidFill>
                 <a:latin typeface="Amiri" pitchFamily="2" charset="-78"/>
+                <a:ea typeface="Amiri" pitchFamily="2" charset="-78"/>
                 <a:cs typeface="Amiri" pitchFamily="2" charset="-78"/>
               </a:rPr>
               <a:t>صِفْ يَوْمًا كَانَ فِيهِ الطَّقْسُ سَيِّئًا جِدًّا.</a:t>
@@ -24590,6 +24769,7 @@
                   <a:srgbClr val="1B3B6F"/>
                 </a:solidFill>
                 <a:latin typeface="Amiri" pitchFamily="2" charset="-78"/>
+                <a:ea typeface="Amiri" pitchFamily="2" charset="-78"/>
                 <a:cs typeface="Amiri" pitchFamily="2" charset="-78"/>
               </a:rPr>
               <a:t>نَعَمْ، عِنْدَمَا تُشْرِقُ الشَّمْسُ أَشْعُرُ بِالنَّشَاطِ، أَمَّا الأَيَّامُ الرَّمَادِيَّةُ فَتَجْعَلُنِي كَسُولًا.</a:t>
@@ -24666,6 +24846,7 @@
                   <a:srgbClr val="1B3B6F"/>
                 </a:solidFill>
                 <a:latin typeface="Amiri" pitchFamily="2" charset="-78"/>
+                <a:ea typeface="Amiri" pitchFamily="2" charset="-78"/>
                 <a:cs typeface="Amiri" pitchFamily="2" charset="-78"/>
               </a:rPr>
               <a:t>هَلْ يُؤَثِّرُ الطَّقْسُ فِي مِزَاجِكَ؟</a:t>
@@ -24769,6 +24950,7 @@
                   <a:srgbClr val="1B3B6F"/>
                 </a:solidFill>
                 <a:latin typeface="Amiri" pitchFamily="2" charset="-78"/>
+                <a:ea typeface="Amiri" pitchFamily="2" charset="-78"/>
                 <a:cs typeface="Amiri" pitchFamily="2" charset="-78"/>
               </a:rPr>
               <a:t>فِي الصَّيْفِ نَسْبَحُ وَنُخَيِّمُ، وَفِي الشِّتَاءِ نَتَزَلَّجُ أَوْ نَبْقَى قُرْبَ المِدْفَأَةِ.</a:t>
@@ -24845,6 +25027,7 @@
                   <a:srgbClr val="1B3B6F"/>
                 </a:solidFill>
                 <a:latin typeface="Amiri" pitchFamily="2" charset="-78"/>
+                <a:ea typeface="Amiri" pitchFamily="2" charset="-78"/>
                 <a:cs typeface="Amiri" pitchFamily="2" charset="-78"/>
               </a:rPr>
               <a:t>مَا الأَنْشِطَةُ المُنَاسِبَةُ لِكُلِّ فَصْلٍ؟</a:t>
@@ -24948,6 +25131,7 @@
                   <a:srgbClr val="1B3B6F"/>
                 </a:solidFill>
                 <a:latin typeface="Amiri" pitchFamily="2" charset="-78"/>
+                <a:ea typeface="Amiri" pitchFamily="2" charset="-78"/>
                 <a:cs typeface="Amiri" pitchFamily="2" charset="-78"/>
               </a:rPr>
               <a:t>حَسَبَ النَّشْرَةِ الجَوِّيَّةِ، سَيَكُونُ الجَوُّ مُعْتَدِلًا، وَسَتَسْقُطُ أَمْطَارٌ خَفِيفَةٌ يَوْمَ الأَحَدِ.</a:t>
@@ -25024,6 +25208,7 @@
                   <a:srgbClr val="1B3B6F"/>
                 </a:solidFill>
                 <a:latin typeface="Amiri" pitchFamily="2" charset="-78"/>
+                <a:ea typeface="Amiri" pitchFamily="2" charset="-78"/>
                 <a:cs typeface="Amiri" pitchFamily="2" charset="-78"/>
               </a:rPr>
               <a:t>كَيْفَ سَيَكُونُ الطَّقْسُ فِي عُطْلَةِ نِهَايَةِ الأُسْبُوعِ؟</a:t>
@@ -25233,6 +25418,7 @@
                   <a:srgbClr val="D4AF37"/>
                 </a:solidFill>
                 <a:latin typeface="Amiri" pitchFamily="2" charset="-78"/>
+                <a:ea typeface="Amiri" pitchFamily="2" charset="-78"/>
                 <a:cs typeface="Amiri" pitchFamily="2" charset="-78"/>
               </a:rPr>
               <a:t>م</a:t>
@@ -25553,6 +25739,7 @@
                   <a:srgbClr val="8A6D1E"/>
                 </a:solidFill>
                 <a:latin typeface="Amiri" pitchFamily="2" charset="-78"/>
+                <a:ea typeface="Amiri" pitchFamily="2" charset="-78"/>
                 <a:cs typeface="Amiri" pitchFamily="2" charset="-78"/>
               </a:rPr>
               <a:t>نَمُوذَجُ الإِجَابَةِ</a:t>
@@ -25795,6 +25982,7 @@
                   <a:srgbClr val="1B3B6F"/>
                 </a:solidFill>
                 <a:latin typeface="Amiri" pitchFamily="2" charset="-78"/>
+                <a:ea typeface="Amiri" pitchFamily="2" charset="-78"/>
                 <a:cs typeface="Amiri" pitchFamily="2" charset="-78"/>
               </a:rPr>
               <a:t>أَعْتَقِدُ ذٰلِكَ، بِدَلِيلِ أَنَّ الصَّيْفَ المَاضِيَ كَانَ أَحَرَّ صَيْفٍ فِي تَارِيخِ بَرِيطَانْيَا.</a:t>
@@ -25871,6 +26059,7 @@
                   <a:srgbClr val="1B3B6F"/>
                 </a:solidFill>
                 <a:latin typeface="Amiri" pitchFamily="2" charset="-78"/>
+                <a:ea typeface="Amiri" pitchFamily="2" charset="-78"/>
                 <a:cs typeface="Amiri" pitchFamily="2" charset="-78"/>
               </a:rPr>
               <a:t>هَلْ تَعْتَقِدُ أَنَّ المُنَاخَ يَتَغَيَّرُ فِعْلًا؟</a:t>
@@ -25974,6 +26163,7 @@
                   <a:srgbClr val="1B3B6F"/>
                 </a:solidFill>
                 <a:latin typeface="Amiri" pitchFamily="2" charset="-78"/>
+                <a:ea typeface="Amiri" pitchFamily="2" charset="-78"/>
                 <a:cs typeface="Amiri" pitchFamily="2" charset="-78"/>
               </a:rPr>
               <a:t>بِسَبَبِ الحَرَارَةِ الشَّدِيدَةِ، يَعْمَلُ النَّاسُ فِي الصَّبَاحِ البَاكِرِ، مِمَّا يَجْعَلُ الحَيَاةَ تَنْشَطُ فِي اللَّيْلِ.</a:t>
@@ -26053,6 +26243,7 @@
                   <a:srgbClr val="1B3B6F"/>
                 </a:solidFill>
                 <a:latin typeface="Amiri" pitchFamily="2" charset="-78"/>
+                <a:ea typeface="Amiri" pitchFamily="2" charset="-78"/>
                 <a:cs typeface="Amiri" pitchFamily="2" charset="-78"/>
               </a:rPr>
               <a:t>كَيْفَ يُؤَثِّرُ المُنَاخُ فِي حَيَاةِ النَّاسِ فِي البِلَادِ الحَارَّةِ؟</a:t>
@@ -26156,6 +26347,7 @@
                   <a:srgbClr val="1B3B6F"/>
                 </a:solidFill>
                 <a:latin typeface="Amiri" pitchFamily="2" charset="-78"/>
+                <a:ea typeface="Amiri" pitchFamily="2" charset="-78"/>
                 <a:cs typeface="Amiri" pitchFamily="2" charset="-78"/>
               </a:rPr>
               <a:t>صَحِيحٌ أَنَّ البَرْدَ مُزْعِجٌ، غَيْرَ أَنَّ الحَرَّ الشَّدِيدَ أَخْطَرُ؛ فَنَسْتَطِيعُ أَنْ نَلْبَسَ مَلَابِسَ أَكْثَرَ، لٰكِنْ لَا نَسْتَطِيعُ الهُرُوبَ مِنَ الحَرِّ بِسُهُولَةٍ.</a:t>
@@ -26232,6 +26424,7 @@
                   <a:srgbClr val="1B3B6F"/>
                 </a:solidFill>
                 <a:latin typeface="Amiri" pitchFamily="2" charset="-78"/>
+                <a:ea typeface="Amiri" pitchFamily="2" charset="-78"/>
                 <a:cs typeface="Amiri" pitchFamily="2" charset="-78"/>
               </a:rPr>
               <a:t>أَيُّهُمَا أَصْعَبُ: الحَرُّ الشَّدِيدُ أَمِ البَرْدُ الشَّدِيدُ؟</a:t>
@@ -26441,6 +26634,7 @@
                   <a:srgbClr val="D4AF37"/>
                 </a:solidFill>
                 <a:latin typeface="Amiri" pitchFamily="2" charset="-78"/>
+                <a:ea typeface="Amiri" pitchFamily="2" charset="-78"/>
                 <a:cs typeface="Amiri" pitchFamily="2" charset="-78"/>
               </a:rPr>
               <a:t>م</a:t>
@@ -26761,6 +26955,7 @@
                   <a:srgbClr val="8A6D1E"/>
                 </a:solidFill>
                 <a:latin typeface="Amiri" pitchFamily="2" charset="-78"/>
+                <a:ea typeface="Amiri" pitchFamily="2" charset="-78"/>
                 <a:cs typeface="Amiri" pitchFamily="2" charset="-78"/>
               </a:rPr>
               <a:t>نَمُوذَجُ الإِجَابَةِ</a:t>
@@ -27003,6 +27198,7 @@
                   <a:srgbClr val="1B3B6F"/>
                 </a:solidFill>
                 <a:latin typeface="Amiri" pitchFamily="2" charset="-78"/>
+                <a:ea typeface="Amiri" pitchFamily="2" charset="-78"/>
                 <a:cs typeface="Amiri" pitchFamily="2" charset="-78"/>
               </a:rPr>
               <a:t>تَقُولُ أُمِّي إِنَّ الشِّتَاءَ كَانَ أَطْوَلَ، وَإِنَّهَا كَانَتْ تَصْنَعُ رَجُلَ الثَّلْجِ كُلَّ سَنَةٍ.</a:t>
@@ -27079,6 +27275,7 @@
                   <a:srgbClr val="1B3B6F"/>
                 </a:solidFill>
                 <a:latin typeface="Amiri" pitchFamily="2" charset="-78"/>
+                <a:ea typeface="Amiri" pitchFamily="2" charset="-78"/>
                 <a:cs typeface="Amiri" pitchFamily="2" charset="-78"/>
               </a:rPr>
               <a:t>كَيْفَ كَانَ الطَّقْسُ فِي طُفُولَةِ وَالِدَيْكَ؟</a:t>
@@ -27182,6 +27379,7 @@
                   <a:srgbClr val="1B3B6F"/>
                 </a:solidFill>
                 <a:latin typeface="Amiri" pitchFamily="2" charset="-78"/>
+                <a:ea typeface="Amiri" pitchFamily="2" charset="-78"/>
                 <a:cs typeface="Amiri" pitchFamily="2" charset="-78"/>
               </a:rPr>
               <a:t>لَوْ كُنْتُ أَسْتَطِيعُ، لَاخْتَرْتُ مُنَاخًا مُعْتَدِلًا كَمُنَاخِ المَغْرِبِ: شَمْسٌ دَافِئَةٌ، وَأَمْطَارٌ قَلِيلَةٌ فِي الشِّتَاءِ.</a:t>
@@ -27261,6 +27459,7 @@
                   <a:srgbClr val="1B3B6F"/>
                 </a:solidFill>
                 <a:latin typeface="Amiri" pitchFamily="2" charset="-78"/>
+                <a:ea typeface="Amiri" pitchFamily="2" charset="-78"/>
                 <a:cs typeface="Amiri" pitchFamily="2" charset="-78"/>
               </a:rPr>
               <a:t>لَوْ كُنْتَ تَسْتَطِيعُ أَنْ تَخْتَارَ مُنَاخَ بِلَادِكَ، مَاذَا تَخْتَارُ؟</a:t>
@@ -27470,6 +27669,7 @@
                   <a:srgbClr val="D4AF37"/>
                 </a:solidFill>
                 <a:latin typeface="Amiri" pitchFamily="2" charset="-78"/>
+                <a:ea typeface="Amiri" pitchFamily="2" charset="-78"/>
                 <a:cs typeface="Amiri" pitchFamily="2" charset="-78"/>
               </a:rPr>
               <a:t>م</a:t>
@@ -27790,6 +27990,7 @@
                   <a:srgbClr val="8A6D1E"/>
                 </a:solidFill>
                 <a:latin typeface="Amiri" pitchFamily="2" charset="-78"/>
+                <a:ea typeface="Amiri" pitchFamily="2" charset="-78"/>
                 <a:cs typeface="Amiri" pitchFamily="2" charset="-78"/>
               </a:rPr>
               <a:t>قَيِّمْ عَمَلَكَ</a:t>
@@ -29034,6 +29235,7 @@
                   <a:srgbClr val="FFFFFF"/>
                 </a:solidFill>
                 <a:latin typeface="Amiri" pitchFamily="2" charset="-78"/>
+                <a:ea typeface="Amiri" pitchFamily="2" charset="-78"/>
                 <a:cs typeface="Amiri" pitchFamily="2" charset="-78"/>
               </a:rPr>
               <a:t>أَحْسَنْتُمْ! إِلَى اللِّقَاءِ</a:t>
@@ -29186,6 +29388,7 @@
                   <a:srgbClr val="D4AF37"/>
                 </a:solidFill>
                 <a:latin typeface="Amiri" pitchFamily="2" charset="-78"/>
+                <a:ea typeface="Amiri" pitchFamily="2" charset="-78"/>
                 <a:cs typeface="Amiri" pitchFamily="2" charset="-78"/>
               </a:rPr>
               <a:t>وَرْشَةُ الكِتَابَةِ</a:t>
@@ -29319,6 +29522,7 @@
                   <a:srgbClr val="D4AF37"/>
                 </a:solidFill>
                 <a:latin typeface="Amiri" pitchFamily="2" charset="-78"/>
+                <a:ea typeface="Amiri" pitchFamily="2" charset="-78"/>
                 <a:cs typeface="Amiri" pitchFamily="2" charset="-78"/>
               </a:rPr>
               <a:t>م</a:t>
@@ -29639,6 +29843,7 @@
                   <a:srgbClr val="8A6D1E"/>
                 </a:solidFill>
                 <a:latin typeface="Amiri" pitchFamily="2" charset="-78"/>
+                <a:ea typeface="Amiri" pitchFamily="2" charset="-78"/>
                 <a:cs typeface="Amiri" pitchFamily="2" charset="-78"/>
               </a:rPr>
               <a:t>خَرِيطَةُ الوَرْشَةِ</a:t>
@@ -29953,6 +30158,7 @@
                   <a:srgbClr val="1B3B6F"/>
                 </a:solidFill>
                 <a:latin typeface="Amiri" pitchFamily="2" charset="-78"/>
+                <a:ea typeface="Amiri" pitchFamily="2" charset="-78"/>
                 <a:cs typeface="Amiri" pitchFamily="2" charset="-78"/>
               </a:rPr>
               <a:t>كَيْفَ</a:t>
@@ -30229,6 +30435,7 @@
                   <a:srgbClr val="1E6B52"/>
                 </a:solidFill>
                 <a:latin typeface="Amiri" pitchFamily="2" charset="-78"/>
+                <a:ea typeface="Amiri" pitchFamily="2" charset="-78"/>
                 <a:cs typeface="Amiri" pitchFamily="2" charset="-78"/>
               </a:rPr>
               <a:t>تَمْثِيلُ الدَّوْرِ</a:t>
@@ -30505,6 +30712,7 @@
                   <a:srgbClr val="8A6D1E"/>
                 </a:solidFill>
                 <a:latin typeface="Amiri" pitchFamily="2" charset="-78"/>
+                <a:ea typeface="Amiri" pitchFamily="2" charset="-78"/>
                 <a:cs typeface="Amiri" pitchFamily="2" charset="-78"/>
               </a:rPr>
               <a:t>النَّمُوذَجُ</a:t>
@@ -30781,6 +30989,7 @@
                   <a:srgbClr val="1E6B52"/>
                 </a:solidFill>
                 <a:latin typeface="Amiri" pitchFamily="2" charset="-78"/>
+                <a:ea typeface="Amiri" pitchFamily="2" charset="-78"/>
                 <a:cs typeface="Amiri" pitchFamily="2" charset="-78"/>
               </a:rPr>
               <a:t>المُحَادَثَةُ</a:t>
@@ -31057,6 +31266,7 @@
                   <a:srgbClr val="8A6D1E"/>
                 </a:solidFill>
                 <a:latin typeface="Amiri" pitchFamily="2" charset="-78"/>
+                <a:ea typeface="Amiri" pitchFamily="2" charset="-78"/>
                 <a:cs typeface="Amiri" pitchFamily="2" charset="-78"/>
               </a:rPr>
               <a:t>قَيِّمْ</a:t>
@@ -31300,6 +31510,7 @@
                   <a:srgbClr val="D4AF37"/>
                 </a:solidFill>
                 <a:latin typeface="Amiri" pitchFamily="2" charset="-78"/>
+                <a:ea typeface="Amiri" pitchFamily="2" charset="-78"/>
                 <a:cs typeface="Amiri" pitchFamily="2" charset="-78"/>
               </a:rPr>
               <a:t>م</a:t>
@@ -31620,6 +31831,7 @@
                   <a:srgbClr val="8A6D1E"/>
                 </a:solidFill>
                 <a:latin typeface="Amiri" pitchFamily="2" charset="-78"/>
+                <a:ea typeface="Amiri" pitchFamily="2" charset="-78"/>
                 <a:cs typeface="Amiri" pitchFamily="2" charset="-78"/>
               </a:rPr>
               <a:t>امْتِحَانُ التَّحَدُّثِ</a:t>
@@ -32244,6 +32456,7 @@
                   <a:srgbClr val="1B3B6F"/>
                 </a:solidFill>
                 <a:latin typeface="Amiri" pitchFamily="2" charset="-78"/>
+                <a:ea typeface="Amiri" pitchFamily="2" charset="-78"/>
                 <a:cs typeface="Amiri" pitchFamily="2" charset="-78"/>
               </a:rPr>
               <a:t>عَفْوًا، هَلْ يُمْكِنُ أَنْ تُعِيدَ السُّؤَالَ؟</a:t>
@@ -32343,6 +32556,7 @@
                   <a:srgbClr val="1B3B6F"/>
                 </a:solidFill>
                 <a:latin typeface="Amiri" pitchFamily="2" charset="-78"/>
+                <a:ea typeface="Amiri" pitchFamily="2" charset="-78"/>
                 <a:cs typeface="Amiri" pitchFamily="2" charset="-78"/>
               </a:rPr>
               <a:t>لَحْظَةً، دَعْنِي أُفَكِّرُ …</a:t>
@@ -32442,6 +32656,7 @@
                   <a:srgbClr val="1B3B6F"/>
                 </a:solidFill>
                 <a:latin typeface="Amiri" pitchFamily="2" charset="-78"/>
+                <a:ea typeface="Amiri" pitchFamily="2" charset="-78"/>
                 <a:cs typeface="Amiri" pitchFamily="2" charset="-78"/>
               </a:rPr>
               <a:t>أَقْصِدُ …</a:t>
@@ -32613,6 +32828,7 @@
                   <a:srgbClr val="D4AF37"/>
                 </a:solidFill>
                 <a:latin typeface="Amiri" pitchFamily="2" charset="-78"/>
+                <a:ea typeface="Amiri" pitchFamily="2" charset="-78"/>
                 <a:cs typeface="Amiri" pitchFamily="2" charset="-78"/>
               </a:rPr>
               <a:t>م</a:t>
@@ -32933,6 +33149,7 @@
                   <a:srgbClr val="8A6D1E"/>
                 </a:solidFill>
                 <a:latin typeface="Amiri" pitchFamily="2" charset="-78"/>
+                <a:ea typeface="Amiri" pitchFamily="2" charset="-78"/>
                 <a:cs typeface="Amiri" pitchFamily="2" charset="-78"/>
               </a:rPr>
               <a:t>كَيْفَ الجَوُّ؟</a:t>
@@ -33236,6 +33453,7 @@
                   <a:srgbClr val="1B3B6F"/>
                 </a:solidFill>
                 <a:latin typeface="Amiri" pitchFamily="2" charset="-78"/>
+                <a:ea typeface="Amiri" pitchFamily="2" charset="-78"/>
                 <a:cs typeface="Amiri" pitchFamily="2" charset="-78"/>
               </a:rPr>
               <a:t>الطَّقْسُ · الجَوُّ</a:t>
@@ -33393,6 +33611,7 @@
                   <a:srgbClr val="1B3B6F"/>
                 </a:solidFill>
                 <a:latin typeface="Amiri" pitchFamily="2" charset="-78"/>
+                <a:ea typeface="Amiri" pitchFamily="2" charset="-78"/>
                 <a:cs typeface="Amiri" pitchFamily="2" charset="-78"/>
               </a:rPr>
               <a:t>المُنَاخُ</a:t>
@@ -33496,6 +33715,7 @@
                   <a:srgbClr val="1B3B6F"/>
                 </a:solidFill>
                 <a:latin typeface="Amiri" pitchFamily="2" charset="-78"/>
+                <a:ea typeface="Amiri" pitchFamily="2" charset="-78"/>
                 <a:cs typeface="Amiri" pitchFamily="2" charset="-78"/>
               </a:rPr>
               <a:t>كَيْفَ الجَوُّ؟</a:t>
@@ -33761,6 +33981,7 @@
                   <a:srgbClr val="1B3B6F"/>
                 </a:solidFill>
                 <a:latin typeface="Amiri" pitchFamily="2" charset="-78"/>
+                <a:ea typeface="Amiri" pitchFamily="2" charset="-78"/>
                 <a:cs typeface="Amiri" pitchFamily="2" charset="-78"/>
               </a:rPr>
               <a:t>مُشْمِسٌ</a:t>
@@ -33918,6 +34139,7 @@
                   <a:srgbClr val="1B3B6F"/>
                 </a:solidFill>
                 <a:latin typeface="Amiri" pitchFamily="2" charset="-78"/>
+                <a:ea typeface="Amiri" pitchFamily="2" charset="-78"/>
                 <a:cs typeface="Amiri" pitchFamily="2" charset="-78"/>
               </a:rPr>
               <a:t>تُشْرِقُ الشَّمْسُ</a:t>
@@ -34021,6 +34243,7 @@
                   <a:srgbClr val="1B3B6F"/>
                 </a:solidFill>
                 <a:latin typeface="Amiri" pitchFamily="2" charset="-78"/>
+                <a:ea typeface="Amiri" pitchFamily="2" charset="-78"/>
                 <a:cs typeface="Amiri" pitchFamily="2" charset="-78"/>
               </a:rPr>
               <a:t>مُشْمِسَةٌ</a:t>
@@ -34286,6 +34509,7 @@
                   <a:srgbClr val="1B3B6F"/>
                 </a:solidFill>
                 <a:latin typeface="Amiri" pitchFamily="2" charset="-78"/>
+                <a:ea typeface="Amiri" pitchFamily="2" charset="-78"/>
                 <a:cs typeface="Amiri" pitchFamily="2" charset="-78"/>
               </a:rPr>
               <a:t>مُمْطِرٌ</a:t>
@@ -34443,6 +34667,7 @@
                   <a:srgbClr val="1B3B6F"/>
                 </a:solidFill>
                 <a:latin typeface="Amiri" pitchFamily="2" charset="-78"/>
+                <a:ea typeface="Amiri" pitchFamily="2" charset="-78"/>
                 <a:cs typeface="Amiri" pitchFamily="2" charset="-78"/>
               </a:rPr>
               <a:t>تَسْقُطُ الأَمْطَارُ</a:t>
@@ -34546,6 +34771,7 @@
                   <a:srgbClr val="1B3B6F"/>
                 </a:solidFill>
                 <a:latin typeface="Amiri" pitchFamily="2" charset="-78"/>
+                <a:ea typeface="Amiri" pitchFamily="2" charset="-78"/>
                 <a:cs typeface="Amiri" pitchFamily="2" charset="-78"/>
               </a:rPr>
               <a:t>مُمْطِرَةٌ</a:t>
@@ -34811,6 +35037,7 @@
                   <a:srgbClr val="1B3B6F"/>
                 </a:solidFill>
                 <a:latin typeface="Amiri" pitchFamily="2" charset="-78"/>
+                <a:ea typeface="Amiri" pitchFamily="2" charset="-78"/>
                 <a:cs typeface="Amiri" pitchFamily="2" charset="-78"/>
               </a:rPr>
               <a:t>غَائِمٌ</a:t>
@@ -34968,6 +35195,7 @@
                   <a:srgbClr val="1B3B6F"/>
                 </a:solidFill>
                 <a:latin typeface="Amiri" pitchFamily="2" charset="-78"/>
+                <a:ea typeface="Amiri" pitchFamily="2" charset="-78"/>
                 <a:cs typeface="Amiri" pitchFamily="2" charset="-78"/>
               </a:rPr>
               <a:t>غُيُومٌ · سُحُبٌ</a:t>
@@ -35071,6 +35299,7 @@
                   <a:srgbClr val="1B3B6F"/>
                 </a:solidFill>
                 <a:latin typeface="Amiri" pitchFamily="2" charset="-78"/>
+                <a:ea typeface="Amiri" pitchFamily="2" charset="-78"/>
                 <a:cs typeface="Amiri" pitchFamily="2" charset="-78"/>
               </a:rPr>
               <a:t>غَائِمَةٌ</a:t>
@@ -35336,6 +35565,7 @@
                   <a:srgbClr val="1B3B6F"/>
                 </a:solidFill>
                 <a:latin typeface="Amiri" pitchFamily="2" charset="-78"/>
+                <a:ea typeface="Amiri" pitchFamily="2" charset="-78"/>
                 <a:cs typeface="Amiri" pitchFamily="2" charset="-78"/>
               </a:rPr>
               <a:t>حَارٌّ · بَارِدٌ</a:t>
@@ -35493,6 +35723,7 @@
                   <a:srgbClr val="1B3B6F"/>
                 </a:solidFill>
                 <a:latin typeface="Amiri" pitchFamily="2" charset="-78"/>
+                <a:ea typeface="Amiri" pitchFamily="2" charset="-78"/>
                 <a:cs typeface="Amiri" pitchFamily="2" charset="-78"/>
               </a:rPr>
               <a:t>أَحَرُّ · أَبْرَدُ</a:t>
@@ -35596,6 +35827,7 @@
                   <a:srgbClr val="1B3B6F"/>
                 </a:solidFill>
                 <a:latin typeface="Amiri" pitchFamily="2" charset="-78"/>
+                <a:ea typeface="Amiri" pitchFamily="2" charset="-78"/>
                 <a:cs typeface="Amiri" pitchFamily="2" charset="-78"/>
               </a:rPr>
               <a:t>حَارَّةٌ · بَارِدَةٌ</a:t>
@@ -35861,6 +36093,7 @@
                   <a:srgbClr val="1B3B6F"/>
                 </a:solidFill>
                 <a:latin typeface="Amiri" pitchFamily="2" charset="-78"/>
+                <a:ea typeface="Amiri" pitchFamily="2" charset="-78"/>
                 <a:cs typeface="Amiri" pitchFamily="2" charset="-78"/>
               </a:rPr>
               <a:t>مُعْتَدِلٌ</a:t>
@@ -36018,6 +36251,7 @@
                   <a:srgbClr val="1B3B6F"/>
                 </a:solidFill>
                 <a:latin typeface="Amiri" pitchFamily="2" charset="-78"/>
+                <a:ea typeface="Amiri" pitchFamily="2" charset="-78"/>
                 <a:cs typeface="Amiri" pitchFamily="2" charset="-78"/>
               </a:rPr>
               <a:t>مُعْتَدِلَةٌ</a:t>
@@ -36121,6 +36355,7 @@
                   <a:srgbClr val="1B3B6F"/>
                 </a:solidFill>
                 <a:latin typeface="Amiri" pitchFamily="2" charset="-78"/>
+                <a:ea typeface="Amiri" pitchFamily="2" charset="-78"/>
                 <a:cs typeface="Amiri" pitchFamily="2" charset="-78"/>
               </a:rPr>
               <a:t>مُعْتَدِلَةٌ</a:t>
@@ -36254,6 +36489,7 @@
                   <a:srgbClr val="D4AF37"/>
                 </a:solidFill>
                 <a:latin typeface="Amiri" pitchFamily="2" charset="-78"/>
+                <a:ea typeface="Amiri" pitchFamily="2" charset="-78"/>
                 <a:cs typeface="Amiri" pitchFamily="2" charset="-78"/>
               </a:rPr>
               <a:t>م</a:t>
@@ -36574,6 +36810,7 @@
                   <a:srgbClr val="8A6D1E"/>
                 </a:solidFill>
                 <a:latin typeface="Amiri" pitchFamily="2" charset="-78"/>
+                <a:ea typeface="Amiri" pitchFamily="2" charset="-78"/>
                 <a:cs typeface="Amiri" pitchFamily="2" charset="-78"/>
               </a:rPr>
               <a:t>الفُصُولُ وَالنَّشْرَةُ الجَوِّيَّةُ</a:t>
@@ -36877,6 +37114,7 @@
                   <a:srgbClr val="1B3B6F"/>
                 </a:solidFill>
                 <a:latin typeface="Amiri" pitchFamily="2" charset="-78"/>
+                <a:ea typeface="Amiri" pitchFamily="2" charset="-78"/>
                 <a:cs typeface="Amiri" pitchFamily="2" charset="-78"/>
               </a:rPr>
               <a:t>ثَلْجٌ</a:t>
@@ -37034,6 +37272,7 @@
                   <a:srgbClr val="1B3B6F"/>
                 </a:solidFill>
                 <a:latin typeface="Amiri" pitchFamily="2" charset="-78"/>
+                <a:ea typeface="Amiri" pitchFamily="2" charset="-78"/>
                 <a:cs typeface="Amiri" pitchFamily="2" charset="-78"/>
               </a:rPr>
               <a:t>تَسْقُطُ الثُّلُوجُ</a:t>
@@ -37137,6 +37376,7 @@
                   <a:srgbClr val="1B3B6F"/>
                 </a:solidFill>
                 <a:latin typeface="Amiri" pitchFamily="2" charset="-78"/>
+                <a:ea typeface="Amiri" pitchFamily="2" charset="-78"/>
                 <a:cs typeface="Amiri" pitchFamily="2" charset="-78"/>
               </a:rPr>
               <a:t>ثُلُوجٌ</a:t>
@@ -37402,6 +37642,7 @@
                   <a:srgbClr val="1B3B6F"/>
                 </a:solidFill>
                 <a:latin typeface="Amiri" pitchFamily="2" charset="-78"/>
+                <a:ea typeface="Amiri" pitchFamily="2" charset="-78"/>
                 <a:cs typeface="Amiri" pitchFamily="2" charset="-78"/>
               </a:rPr>
               <a:t>رِيحٌ</a:t>
@@ -37559,6 +37800,7 @@
                   <a:srgbClr val="1B3B6F"/>
                 </a:solidFill>
                 <a:latin typeface="Amiri" pitchFamily="2" charset="-78"/>
+                <a:ea typeface="Amiri" pitchFamily="2" charset="-78"/>
                 <a:cs typeface="Amiri" pitchFamily="2" charset="-78"/>
               </a:rPr>
               <a:t>تَهُبُّ رِيَاحٌ قَوِيَّةٌ</a:t>
@@ -37662,6 +37904,7 @@
                   <a:srgbClr val="1B3B6F"/>
                 </a:solidFill>
                 <a:latin typeface="Amiri" pitchFamily="2" charset="-78"/>
+                <a:ea typeface="Amiri" pitchFamily="2" charset="-78"/>
                 <a:cs typeface="Amiri" pitchFamily="2" charset="-78"/>
               </a:rPr>
               <a:t>رِيَاحٌ</a:t>
@@ -37927,6 +38170,7 @@
                   <a:srgbClr val="1B3B6F"/>
                 </a:solidFill>
                 <a:latin typeface="Amiri" pitchFamily="2" charset="-78"/>
+                <a:ea typeface="Amiri" pitchFamily="2" charset="-78"/>
                 <a:cs typeface="Amiri" pitchFamily="2" charset="-78"/>
               </a:rPr>
               <a:t>دَرَجَةُ الحَرَارَةِ</a:t>
@@ -38084,6 +38328,7 @@
                   <a:srgbClr val="1B3B6F"/>
                 </a:solidFill>
                 <a:latin typeface="Amiri" pitchFamily="2" charset="-78"/>
+                <a:ea typeface="Amiri" pitchFamily="2" charset="-78"/>
                 <a:cs typeface="Amiri" pitchFamily="2" charset="-78"/>
               </a:rPr>
               <a:t>ثَلَاثُونَ دَرَجَةً</a:t>
@@ -38187,6 +38432,7 @@
                   <a:srgbClr val="1B3B6F"/>
                 </a:solidFill>
                 <a:latin typeface="Amiri" pitchFamily="2" charset="-78"/>
+                <a:ea typeface="Amiri" pitchFamily="2" charset="-78"/>
                 <a:cs typeface="Amiri" pitchFamily="2" charset="-78"/>
               </a:rPr>
               <a:t>دَرَجَاتُ الحَرَارَةِ</a:t>
@@ -38452,6 +38698,7 @@
                   <a:srgbClr val="1B3B6F"/>
                 </a:solidFill>
                 <a:latin typeface="Amiri" pitchFamily="2" charset="-78"/>
+                <a:ea typeface="Amiri" pitchFamily="2" charset="-78"/>
                 <a:cs typeface="Amiri" pitchFamily="2" charset="-78"/>
               </a:rPr>
               <a:t>فَصْلٌ</a:t>
@@ -38609,6 +38856,7 @@
                   <a:srgbClr val="1B3B6F"/>
                 </a:solidFill>
                 <a:latin typeface="Amiri" pitchFamily="2" charset="-78"/>
+                <a:ea typeface="Amiri" pitchFamily="2" charset="-78"/>
                 <a:cs typeface="Amiri" pitchFamily="2" charset="-78"/>
               </a:rPr>
               <a:t>الفُصُولُ الأَرْبَعَةُ</a:t>
@@ -38712,6 +38960,7 @@
                   <a:srgbClr val="1B3B6F"/>
                 </a:solidFill>
                 <a:latin typeface="Amiri" pitchFamily="2" charset="-78"/>
+                <a:ea typeface="Amiri" pitchFamily="2" charset="-78"/>
                 <a:cs typeface="Amiri" pitchFamily="2" charset="-78"/>
               </a:rPr>
               <a:t>فُصُولٌ</a:t>
@@ -38977,6 +39226,7 @@
                   <a:srgbClr val="1B3B6F"/>
                 </a:solidFill>
                 <a:latin typeface="Amiri" pitchFamily="2" charset="-78"/>
+                <a:ea typeface="Amiri" pitchFamily="2" charset="-78"/>
                 <a:cs typeface="Amiri" pitchFamily="2" charset="-78"/>
               </a:rPr>
               <a:t>الصَّيْفُ · الشِّتَاءُ</a:t>
@@ -39134,6 +39384,7 @@
                   <a:srgbClr val="1B3B6F"/>
                 </a:solidFill>
                 <a:latin typeface="Amiri" pitchFamily="2" charset="-78"/>
+                <a:ea typeface="Amiri" pitchFamily="2" charset="-78"/>
                 <a:cs typeface="Amiri" pitchFamily="2" charset="-78"/>
               </a:rPr>
               <a:t>الرَّبِيعُ · الخَرِيفُ</a:t>
@@ -39399,6 +39650,7 @@
                   <a:srgbClr val="1B3B6F"/>
                 </a:solidFill>
                 <a:latin typeface="Amiri" pitchFamily="2" charset="-78"/>
+                <a:ea typeface="Amiri" pitchFamily="2" charset="-78"/>
                 <a:cs typeface="Amiri" pitchFamily="2" charset="-78"/>
               </a:rPr>
               <a:t>النَّشْرَةُ الجَوِّيَّةُ</a:t>
@@ -39556,6 +39808,7 @@
                   <a:srgbClr val="1B3B6F"/>
                 </a:solidFill>
                 <a:latin typeface="Amiri" pitchFamily="2" charset="-78"/>
+                <a:ea typeface="Amiri" pitchFamily="2" charset="-78"/>
                 <a:cs typeface="Amiri" pitchFamily="2" charset="-78"/>
               </a:rPr>
               <a:t>مِنَ المُتَوَقَّعِ أَنْ …</a:t>
@@ -39659,6 +39912,7 @@
                   <a:srgbClr val="1B3B6F"/>
                 </a:solidFill>
                 <a:latin typeface="Amiri" pitchFamily="2" charset="-78"/>
+                <a:ea typeface="Amiri" pitchFamily="2" charset="-78"/>
                 <a:cs typeface="Amiri" pitchFamily="2" charset="-78"/>
               </a:rPr>
               <a:t>النَّشَرَاتُ الجَوِّيَّةُ</a:t>
@@ -39792,6 +40046,7 @@
                   <a:srgbClr val="D4AF37"/>
                 </a:solidFill>
                 <a:latin typeface="Amiri" pitchFamily="2" charset="-78"/>
+                <a:ea typeface="Amiri" pitchFamily="2" charset="-78"/>
                 <a:cs typeface="Amiri" pitchFamily="2" charset="-78"/>
               </a:rPr>
               <a:t>م</a:t>
@@ -40112,6 +40367,7 @@
                   <a:srgbClr val="8A6D1E"/>
                 </a:solidFill>
                 <a:latin typeface="Amiri" pitchFamily="2" charset="-78"/>
+                <a:ea typeface="Amiri" pitchFamily="2" charset="-78"/>
                 <a:cs typeface="Amiri" pitchFamily="2" charset="-78"/>
               </a:rPr>
               <a:t>فِي الغُرَفِ</a:t>
@@ -41288,6 +41544,7 @@
                   <a:srgbClr val="1B3B6F"/>
                 </a:solidFill>
                 <a:latin typeface="Amiri" pitchFamily="2" charset="-78"/>
+                <a:ea typeface="Amiri" pitchFamily="2" charset="-78"/>
                 <a:cs typeface="Amiri" pitchFamily="2" charset="-78"/>
               </a:rPr>
               <a:t>دَوْرُكَ!</a:t>
@@ -41364,6 +41621,7 @@
                   <a:srgbClr val="1B3B6F"/>
                 </a:solidFill>
                 <a:latin typeface="Amiri" pitchFamily="2" charset="-78"/>
+                <a:ea typeface="Amiri" pitchFamily="2" charset="-78"/>
                 <a:cs typeface="Amiri" pitchFamily="2" charset="-78"/>
               </a:rPr>
               <a:t>أَحْسَنْتَ! / أَحْسَنْتِ!</a:t>
@@ -41440,6 +41698,7 @@
                   <a:srgbClr val="1B3B6F"/>
                 </a:solidFill>
                 <a:latin typeface="Amiri" pitchFamily="2" charset="-78"/>
+                <a:ea typeface="Amiri" pitchFamily="2" charset="-78"/>
                 <a:cs typeface="Amiri" pitchFamily="2" charset="-78"/>
               </a:rPr>
               <a:t>تَكَلَّمْ أَكْثَرَ، مِنْ فَضْلِكَ</a:t>
@@ -41516,6 +41775,7 @@
                   <a:srgbClr val="1B3B6F"/>
                 </a:solidFill>
                 <a:latin typeface="Amiri" pitchFamily="2" charset="-78"/>
+                <a:ea typeface="Amiri" pitchFamily="2" charset="-78"/>
                 <a:cs typeface="Amiri" pitchFamily="2" charset="-78"/>
               </a:rPr>
               <a:t>لِمَاذَا؟</a:t>
@@ -41687,6 +41947,7 @@
                   <a:srgbClr val="D4AF37"/>
                 </a:solidFill>
                 <a:latin typeface="Amiri" pitchFamily="2" charset="-78"/>
+                <a:ea typeface="Amiri" pitchFamily="2" charset="-78"/>
                 <a:cs typeface="Amiri" pitchFamily="2" charset="-78"/>
               </a:rPr>
               <a:t>م</a:t>
@@ -42007,6 +42268,7 @@
                   <a:srgbClr val="8A6D1E"/>
                 </a:solidFill>
                 <a:latin typeface="Amiri" pitchFamily="2" charset="-78"/>
+                <a:ea typeface="Amiri" pitchFamily="2" charset="-78"/>
                 <a:cs typeface="Amiri" pitchFamily="2" charset="-78"/>
               </a:rPr>
               <a:t>مُكَالَمَةٌ عَنِ الطَّقْسِ</a:t>
@@ -42287,6 +42549,7 @@
                   <a:srgbClr val="1B3B6F"/>
                 </a:solidFill>
                 <a:latin typeface="Amiri" pitchFamily="2" charset="-78"/>
+                <a:ea typeface="Amiri" pitchFamily="2" charset="-78"/>
                 <a:cs typeface="Amiri" pitchFamily="2" charset="-78"/>
               </a:rPr>
               <a:t>الجَوُّ اليَوْمَ … وَ…</a:t>
@@ -42363,6 +42626,7 @@
                   <a:srgbClr val="1B3B6F"/>
                 </a:solidFill>
                 <a:latin typeface="Amiri" pitchFamily="2" charset="-78"/>
+                <a:ea typeface="Amiri" pitchFamily="2" charset="-78"/>
                 <a:cs typeface="Amiri" pitchFamily="2" charset="-78"/>
               </a:rPr>
               <a:t>كَيْفَ الجَوُّ عِنْدَكُمُ اليَوْمَ؟</a:t>
@@ -42531,6 +42795,7 @@
                   <a:srgbClr val="1B3B6F"/>
                 </a:solidFill>
                 <a:latin typeface="Amiri" pitchFamily="2" charset="-78"/>
+                <a:ea typeface="Amiri" pitchFamily="2" charset="-78"/>
                 <a:cs typeface="Amiri" pitchFamily="2" charset="-78"/>
               </a:rPr>
               <a:t>نَعَمْ، تَسْقُطُ … / لَا، …</a:t>
@@ -42607,6 +42872,7 @@
                   <a:srgbClr val="1B3B6F"/>
                 </a:solidFill>
                 <a:latin typeface="Amiri" pitchFamily="2" charset="-78"/>
+                <a:ea typeface="Amiri" pitchFamily="2" charset="-78"/>
                 <a:cs typeface="Amiri" pitchFamily="2" charset="-78"/>
               </a:rPr>
               <a:t>هَلْ تَسْقُطُ الأَمْطَارُ؟</a:t>
@@ -42775,6 +43041,7 @@
                   <a:srgbClr val="1B3B6F"/>
                 </a:solidFill>
                 <a:latin typeface="Amiri" pitchFamily="2" charset="-78"/>
+                <a:ea typeface="Amiri" pitchFamily="2" charset="-78"/>
                 <a:cs typeface="Amiri" pitchFamily="2" charset="-78"/>
               </a:rPr>
               <a:t>دَرَجَةُ الحَرَارَةِ … دَرَجَاتٍ</a:t>
@@ -42851,6 +43118,7 @@
                   <a:srgbClr val="1B3B6F"/>
                 </a:solidFill>
                 <a:latin typeface="Amiri" pitchFamily="2" charset="-78"/>
+                <a:ea typeface="Amiri" pitchFamily="2" charset="-78"/>
                 <a:cs typeface="Amiri" pitchFamily="2" charset="-78"/>
               </a:rPr>
               <a:t>كَمْ دَرَجَةُ الحَرَارَةِ؟</a:t>
@@ -43019,6 +43287,7 @@
                   <a:srgbClr val="1B3B6F"/>
                 </a:solidFill>
                 <a:latin typeface="Amiri" pitchFamily="2" charset="-78"/>
+                <a:ea typeface="Amiri" pitchFamily="2" charset="-78"/>
                 <a:cs typeface="Amiri" pitchFamily="2" charset="-78"/>
               </a:rPr>
               <a:t>كَمْ …؟</a:t>
@@ -43095,6 +43364,7 @@
                   <a:srgbClr val="1B3B6F"/>
                 </a:solidFill>
                 <a:latin typeface="Amiri" pitchFamily="2" charset="-78"/>
+                <a:ea typeface="Amiri" pitchFamily="2" charset="-78"/>
                 <a:cs typeface="Amiri" pitchFamily="2" charset="-78"/>
               </a:rPr>
               <a:t>عِنْدَنَا الجَوُّ حَارٌّ جِدًّا!</a:t>
@@ -43263,6 +43533,7 @@
                   <a:srgbClr val="1B3B6F"/>
                 </a:solidFill>
                 <a:latin typeface="Amiri" pitchFamily="2" charset="-78"/>
+                <a:ea typeface="Amiri" pitchFamily="2" charset="-78"/>
                 <a:cs typeface="Amiri" pitchFamily="2" charset="-78"/>
               </a:rPr>
               <a:t>فَصْلِي المُفَضَّلُ … لِأَنَّ …</a:t>
@@ -43339,6 +43610,7 @@
                   <a:srgbClr val="1B3B6F"/>
                 </a:solidFill>
                 <a:latin typeface="Amiri" pitchFamily="2" charset="-78"/>
+                <a:ea typeface="Amiri" pitchFamily="2" charset="-78"/>
                 <a:cs typeface="Amiri" pitchFamily="2" charset="-78"/>
               </a:rPr>
               <a:t>مَا فَصْلُكَ المُفَضَّلُ؟</a:t>
@@ -43613,6 +43885,7 @@
                   <a:srgbClr val="D4AF37"/>
                 </a:solidFill>
                 <a:latin typeface="Amiri" pitchFamily="2" charset="-78"/>
+                <a:ea typeface="Amiri" pitchFamily="2" charset="-78"/>
                 <a:cs typeface="Amiri" pitchFamily="2" charset="-78"/>
               </a:rPr>
               <a:t>م</a:t>
@@ -43933,6 +44206,7 @@
                   <a:srgbClr val="8A6D1E"/>
                 </a:solidFill>
                 <a:latin typeface="Amiri" pitchFamily="2" charset="-78"/>
+                <a:ea typeface="Amiri" pitchFamily="2" charset="-78"/>
                 <a:cs typeface="Amiri" pitchFamily="2" charset="-78"/>
               </a:rPr>
               <a:t>حَقِيبَةُ السَّفَرِ</a:t>
@@ -44213,6 +44487,7 @@
                   <a:srgbClr val="1B3B6F"/>
                 </a:solidFill>
                 <a:latin typeface="Amiri" pitchFamily="2" charset="-78"/>
+                <a:ea typeface="Amiri" pitchFamily="2" charset="-78"/>
                 <a:cs typeface="Amiri" pitchFamily="2" charset="-78"/>
               </a:rPr>
               <a:t>أُسَافِرُ إِلَى … الجَوُّ هُنَاكَ …</a:t>
@@ -44289,6 +44564,7 @@
                   <a:srgbClr val="1B3B6F"/>
                 </a:solidFill>
                 <a:latin typeface="Amiri" pitchFamily="2" charset="-78"/>
+                <a:ea typeface="Amiri" pitchFamily="2" charset="-78"/>
                 <a:cs typeface="Amiri" pitchFamily="2" charset="-78"/>
               </a:rPr>
               <a:t>إِلَى أَيْنَ تُسَافِرُ؟ وَكَيْفَ الجَوُّ هُنَاكَ؟</a:t>
@@ -44457,6 +44733,7 @@
                   <a:srgbClr val="1B3B6F"/>
                 </a:solidFill>
                 <a:latin typeface="Amiri" pitchFamily="2" charset="-78"/>
+                <a:ea typeface="Amiri" pitchFamily="2" charset="-78"/>
                 <a:cs typeface="Amiri" pitchFamily="2" charset="-78"/>
               </a:rPr>
               <a:t>سَآخُذُ … وَ…</a:t>
@@ -44533,6 +44810,7 @@
                   <a:srgbClr val="1B3B6F"/>
                 </a:solidFill>
                 <a:latin typeface="Amiri" pitchFamily="2" charset="-78"/>
+                <a:ea typeface="Amiri" pitchFamily="2" charset="-78"/>
                 <a:cs typeface="Amiri" pitchFamily="2" charset="-78"/>
               </a:rPr>
               <a:t>مَاذَا سَتَأْخُذُ مِنْ مَلَابِسَ؟</a:t>
@@ -44701,6 +44979,7 @@
                   <a:srgbClr val="1B3B6F"/>
                 </a:solidFill>
                 <a:latin typeface="Amiri" pitchFamily="2" charset="-78"/>
+                <a:ea typeface="Amiri" pitchFamily="2" charset="-78"/>
                 <a:cs typeface="Amiri" pitchFamily="2" charset="-78"/>
               </a:rPr>
               <a:t>مَاذَا تَقُولُ …؟</a:t>
@@ -44777,6 +45056,7 @@
                   <a:srgbClr val="1B3B6F"/>
                 </a:solidFill>
                 <a:latin typeface="Amiri" pitchFamily="2" charset="-78"/>
+                <a:ea typeface="Amiri" pitchFamily="2" charset="-78"/>
                 <a:cs typeface="Amiri" pitchFamily="2" charset="-78"/>
               </a:rPr>
               <a:t>لٰكِنْ قَدْ تَتَغَيَّرُ الأَحْوَالُ الجَوِّيَّةُ.</a:t>
@@ -44880,6 +45160,7 @@
                   <a:srgbClr val="1B3B6F"/>
                 </a:solidFill>
                 <a:latin typeface="Amiri" pitchFamily="2" charset="-78"/>
+                <a:ea typeface="Amiri" pitchFamily="2" charset="-78"/>
                 <a:cs typeface="Amiri" pitchFamily="2" charset="-78"/>
               </a:rPr>
               <a:t>إِذَنْ سَآخُذُ … لِأَنَّ …</a:t>
@@ -44956,6 +45237,7 @@
                   <a:srgbClr val="1B3B6F"/>
                 </a:solidFill>
                 <a:latin typeface="Amiri" pitchFamily="2" charset="-78"/>
+                <a:ea typeface="Amiri" pitchFamily="2" charset="-78"/>
                 <a:cs typeface="Amiri" pitchFamily="2" charset="-78"/>
               </a:rPr>
               <a:t>سَتَهُبُّ رِيَاحٌ قَوِيَّةٌ فِي اللَّيْلِ.</a:t>
@@ -45059,6 +45341,7 @@
                   <a:srgbClr val="1B3B6F"/>
                 </a:solidFill>
                 <a:latin typeface="Amiri" pitchFamily="2" charset="-78"/>
+                <a:ea typeface="Amiri" pitchFamily="2" charset="-78"/>
                 <a:cs typeface="Amiri" pitchFamily="2" charset="-78"/>
               </a:rPr>
               <a:t>نَعَمْ / لَا، أُحِبُّ … أَكْثَرَ، لِأَنَّ …</a:t>
@@ -45135,6 +45418,7 @@
                   <a:srgbClr val="1B3B6F"/>
                 </a:solidFill>
                 <a:latin typeface="Amiri" pitchFamily="2" charset="-78"/>
+                <a:ea typeface="Amiri" pitchFamily="2" charset="-78"/>
                 <a:cs typeface="Amiri" pitchFamily="2" charset="-78"/>
               </a:rPr>
               <a:t>هَلْ تُحِبُّ الجَوَّ الحَارَّ أَكْثَرَ مِنَ الجَوِّ البَارِدِ؟</a:t>
@@ -45309,13 +45593,9 @@
     <a:fontScheme name="Office">
       <a:majorFont>
         <a:latin typeface="Calibri Light" panose="020F0302020204030204"/>
-        <a:ea typeface=""/>
-        <a:cs typeface=""/>
-        <a:font script="Jpan" typeface="游ゴシック Light"/>
-        <a:font script="Hang" typeface="맑은 고딕"/>
-        <a:font script="Hans" typeface="等线 Light"/>
-        <a:font script="Hant" typeface="新細明體"/>
-        <a:font script="Arab" typeface="Times New Roman"/>
+        <a:ea typeface="Amiri" pitchFamily="2" charset="-78"/>
+        <a:cs typeface="Amiri" pitchFamily="2" charset="-78"/>
+        <a:font script="Arab" typeface="Amiri"/>
         <a:font script="Hebr" typeface="Times New Roman"/>
         <a:font script="Thai" typeface="Angsana New"/>
         <a:font script="Ethi" typeface="Nyala"/>
@@ -45361,13 +45641,9 @@
       </a:majorFont>
       <a:minorFont>
         <a:latin typeface="Calibri" panose="020F0502020204030204"/>
-        <a:ea typeface=""/>
-        <a:cs typeface=""/>
-        <a:font script="Jpan" typeface="游ゴシック"/>
-        <a:font script="Hang" typeface="맑은 고딕"/>
-        <a:font script="Hans" typeface="等线"/>
-        <a:font script="Hant" typeface="新細明體"/>
-        <a:font script="Arab" typeface="Arial"/>
+        <a:ea typeface="Amiri" pitchFamily="2" charset="-78"/>
+        <a:cs typeface="Amiri" pitchFamily="2" charset="-78"/>
+        <a:font script="Arab" typeface="Amiri"/>
         <a:font script="Hebr" typeface="Arial"/>
         <a:font script="Thai" typeface="Cordia New"/>
         <a:font script="Ethi" typeface="Nyala"/>
